--- a/project_32_predictive_maintenance/presentations/project_presentation.pptx
+++ b/project_32_predictive_maintenance/presentations/project_presentation.pptx
@@ -13,6 +13,13 @@
     <p:sldId id="261" r:id="rId12"/>
     <p:sldId id="262" r:id="rId13"/>
     <p:sldId id="263" r:id="rId14"/>
+    <p:sldId id="264" r:id="rId15"/>
+    <p:sldId id="265" r:id="rId16"/>
+    <p:sldId id="266" r:id="rId17"/>
+    <p:sldId id="267" r:id="rId18"/>
+    <p:sldId id="268" r:id="rId19"/>
+    <p:sldId id="269" r:id="rId20"/>
+    <p:sldId id="270" r:id="rId21"/>
   </p:sldIdLst>
   <p:sldSz cx="12191695" cy="6858000" type="screen4x3"/>
   <p:notesSz cx="6858000" cy="9144000"/>
@@ -3110,7 +3117,7 @@
             <a:avLst/>
           </a:prstGeom>
           <a:solidFill>
-            <a:srgbClr val="0F172A"/>
+            <a:srgbClr val="070D18"/>
           </a:solidFill>
           <a:ln>
             <a:noFill/>
@@ -3146,8 +3153,8 @@
         </p:nvSpPr>
         <p:spPr>
           <a:xfrm>
-            <a:off x="1097280" y="1645920"/>
-            <a:ext cx="10058400" cy="3474720"/>
+            <a:off x="914400" y="1645920"/>
+            <a:ext cx="10332720" cy="3474720"/>
           </a:xfrm>
           <a:prstGeom prst="rect">
             <a:avLst/>
@@ -3163,42 +3170,2021 @@
             <a:pPr>
               <a:defRPr sz="1400" b="1">
                 <a:solidFill>
-                  <a:srgbClr val="38BDF8"/>
-                </a:solidFill>
-              </a:defRPr>
-            </a:pPr>
-            <a:r>
-              <a:t>PROJECT 32 OF 55  •  RESEARCH &amp; IMPLEMENTATION DECK</a:t>
-            </a:r>
-          </a:p>
-          <a:p>
-            <a:pPr>
-              <a:spcBef>
-                <a:spcPts val="1400"/>
-              </a:spcBef>
-              <a:defRPr sz="3200" b="1">
-                <a:solidFill>
-                  <a:srgbClr val="FFFFFF"/>
-                </a:solidFill>
-              </a:defRPr>
-            </a:pPr>
-            <a:r>
-              <a:t>PREDICTIVE MAINTENANCE OF INDUSTRIAL MACHINES USING MULTIVARIATE SENSOR DATA AND DEEP LEARNING</a:t>
-            </a:r>
-          </a:p>
-          <a:p>
-            <a:pPr>
-              <a:spcBef>
-                <a:spcPts val="1200"/>
-              </a:spcBef>
+                  <a:srgbClr val="F59E0B"/>
+                </a:solidFill>
+              </a:defRPr>
+            </a:pPr>
+            <a:r>
+              <a:t>PROJECT-032 CAPSTONE DEFENSE</a:t>
+            </a:r>
+          </a:p>
+          <a:p>
+            <a:pPr>
+              <a:defRPr sz="3400" b="1">
+                <a:solidFill>
+                  <a:srgbClr val="F8FAFC"/>
+                </a:solidFill>
+              </a:defRPr>
+            </a:pPr>
+            <a:r>
+              <a:t>Predictive Maintenance of Industrial Machines</a:t>
+            </a:r>
+            <a:br/>
+            <a:r>
+              <a:t>Using Multivariate Sensor Data &amp; Deep Learning</a:t>
+            </a:r>
+          </a:p>
+          <a:p>
+            <a:pPr>
               <a:defRPr sz="1600">
                 <a:solidFill>
-                  <a:srgbClr val="CBD5E1"/>
-                </a:solidFill>
-              </a:defRPr>
-            </a:pPr>
-            <a:r>
-              <a:t>Enterprise-Grade AI Architecture, Machine Learning Pipeline &amp; Deployment Framework</a:t>
+                  <a:srgbClr val="06B6D4"/>
+                </a:solidFill>
+              </a:defRPr>
+            </a:pPr>
+            <a:r>
+              <a:t>Deep Neural Fault Diagnostics, Remaining Useful Life (RUL) &amp; Real-Time Work Order Dispatch</a:t>
+            </a:r>
+          </a:p>
+          <a:p>
+            <a:br/>
+            <a:pPr>
+              <a:defRPr sz="1200">
+                <a:solidFill>
+                  <a:srgbClr val="94A3B8"/>
+                </a:solidFill>
+              </a:defRPr>
+            </a:pPr>
+            <a:r>
+              <a:t>Dual PyTorch Models • 6,000 Sensor Records • SQLite WAL Persistence • 31 Passing QA Tests</a:t>
+            </a:r>
+          </a:p>
+        </p:txBody>
+      </p:sp>
+    </p:spTree>
+  </p:cSld>
+  <p:clrMapOvr>
+    <a:masterClrMapping/>
+  </p:clrMapOvr>
+</p:sld>
+</file>
+
+<file path=ppt/slides/slide10.xml><?xml version="1.0" encoding="utf-8"?>
+<p:sld xmlns:a="http://schemas.openxmlformats.org/drawingml/2006/main" xmlns:p="http://schemas.openxmlformats.org/presentationml/2006/main" xmlns:r="http://schemas.openxmlformats.org/officeDocument/2006/relationships">
+  <p:cSld>
+    <p:spTree>
+      <p:nvGrpSpPr>
+        <p:cNvPr id="1" name=""/>
+        <p:cNvGrpSpPr/>
+        <p:nvPr/>
+      </p:nvGrpSpPr>
+      <p:grpSpPr/>
+      <p:sp>
+        <p:nvSpPr>
+          <p:cNvPr id="2" name="Rectangle 1"/>
+          <p:cNvSpPr/>
+          <p:nvPr/>
+        </p:nvSpPr>
+        <p:spPr>
+          <a:xfrm>
+            <a:off x="0" y="0"/>
+            <a:ext cx="12191695" cy="6858000"/>
+          </a:xfrm>
+          <a:prstGeom prst="rect">
+            <a:avLst/>
+          </a:prstGeom>
+          <a:solidFill>
+            <a:srgbClr val="070D18"/>
+          </a:solidFill>
+          <a:ln>
+            <a:noFill/>
+          </a:ln>
+        </p:spPr>
+        <p:style>
+          <a:lnRef idx="1">
+            <a:schemeClr val="accent1"/>
+          </a:lnRef>
+          <a:fillRef idx="3">
+            <a:schemeClr val="accent1"/>
+          </a:fillRef>
+          <a:effectRef idx="2">
+            <a:schemeClr val="accent1"/>
+          </a:effectRef>
+          <a:fontRef idx="minor">
+            <a:schemeClr val="lt1"/>
+          </a:fontRef>
+        </p:style>
+        <p:txBody>
+          <a:bodyPr rtlCol="0" anchor="ctr"/>
+          <a:lstStyle/>
+          <a:p>
+            <a:pPr algn="ctr"/>
+          </a:p>
+        </p:txBody>
+      </p:sp>
+      <p:sp>
+        <p:nvSpPr>
+          <p:cNvPr id="3" name="TextBox 2"/>
+          <p:cNvSpPr txBox="1"/>
+          <p:nvPr/>
+        </p:nvSpPr>
+        <p:spPr>
+          <a:xfrm>
+            <a:off x="731520" y="365760"/>
+            <a:ext cx="10698480" cy="1005840"/>
+          </a:xfrm>
+          <a:prstGeom prst="rect">
+            <a:avLst/>
+          </a:prstGeom>
+          <a:noFill/>
+        </p:spPr>
+        <p:txBody>
+          <a:bodyPr wrap="square" lIns="0" tIns="0" rIns="0" bIns="0">
+            <a:spAutoFit/>
+          </a:bodyPr>
+          <a:lstStyle/>
+          <a:p>
+            <a:pPr>
+              <a:defRPr sz="1000" b="1">
+                <a:solidFill>
+                  <a:srgbClr val="F59E0B"/>
+                </a:solidFill>
+              </a:defRPr>
+            </a:pPr>
+            <a:r>
+              <a:t>PROJECT 32 • INDUSTRIAL AI &amp; PREDICTIVE TELEMATICS</a:t>
+            </a:r>
+          </a:p>
+          <a:p>
+            <a:pPr>
+              <a:defRPr sz="2200" b="1">
+                <a:solidFill>
+                  <a:srgbClr val="F8FAFC"/>
+                </a:solidFill>
+              </a:defRPr>
+            </a:pPr>
+            <a:r>
+              <a:t>Multivariate Diagnostics: Health Profile Radar Analysis</a:t>
+            </a:r>
+          </a:p>
+        </p:txBody>
+      </p:sp>
+      <p:pic>
+        <p:nvPicPr>
+          <p:cNvPr id="4" name="Picture 3" descr="03_health_radar_diagnostics.png"/>
+          <p:cNvPicPr>
+            <a:picLocks noChangeAspect="1"/>
+          </p:cNvPicPr>
+          <p:nvPr/>
+        </p:nvPicPr>
+        <p:blipFill>
+          <a:blip r:embed="rId2"/>
+          <a:stretch>
+            <a:fillRect/>
+          </a:stretch>
+        </p:blipFill>
+        <p:spPr>
+          <a:xfrm>
+            <a:off x="731520" y="1645920"/>
+            <a:ext cx="6858000" cy="4572000"/>
+          </a:xfrm>
+          <a:prstGeom prst="rect">
+            <a:avLst/>
+          </a:prstGeom>
+        </p:spPr>
+      </p:pic>
+      <p:sp>
+        <p:nvSpPr>
+          <p:cNvPr id="5" name="Rounded Rectangle 4"/>
+          <p:cNvSpPr/>
+          <p:nvPr/>
+        </p:nvSpPr>
+        <p:spPr>
+          <a:xfrm>
+            <a:off x="7863840" y="1645920"/>
+            <a:ext cx="3566160" cy="4572000"/>
+          </a:xfrm>
+          <a:prstGeom prst="roundRect">
+            <a:avLst/>
+          </a:prstGeom>
+          <a:solidFill>
+            <a:srgbClr val="0F1C30"/>
+          </a:solidFill>
+          <a:ln w="9525">
+            <a:solidFill>
+              <a:srgbClr val="FFFFFF"/>
+            </a:solidFill>
+          </a:ln>
+        </p:spPr>
+        <p:style>
+          <a:lnRef idx="1">
+            <a:schemeClr val="accent1"/>
+          </a:lnRef>
+          <a:fillRef idx="3">
+            <a:schemeClr val="accent1"/>
+          </a:fillRef>
+          <a:effectRef idx="2">
+            <a:schemeClr val="accent1"/>
+          </a:effectRef>
+          <a:fontRef idx="minor">
+            <a:schemeClr val="lt1"/>
+          </a:fontRef>
+        </p:style>
+        <p:txBody>
+          <a:bodyPr rtlCol="0" anchor="ctr"/>
+          <a:lstStyle/>
+          <a:p>
+            <a:pPr algn="ctr"/>
+          </a:p>
+        </p:txBody>
+      </p:sp>
+      <p:sp>
+        <p:nvSpPr>
+          <p:cNvPr id="6" name="TextBox 5"/>
+          <p:cNvSpPr txBox="1"/>
+          <p:nvPr/>
+        </p:nvSpPr>
+        <p:spPr>
+          <a:xfrm>
+            <a:off x="8092440" y="1828800"/>
+            <a:ext cx="3108960" cy="4206240"/>
+          </a:xfrm>
+          <a:prstGeom prst="rect">
+            <a:avLst/>
+          </a:prstGeom>
+          <a:noFill/>
+        </p:spPr>
+        <p:txBody>
+          <a:bodyPr wrap="square" lIns="0" tIns="0" rIns="0" bIns="0">
+            <a:spAutoFit/>
+          </a:bodyPr>
+          <a:lstStyle/>
+          <a:p>
+            <a:pPr>
+              <a:defRPr sz="1400" b="1">
+                <a:solidFill>
+                  <a:srgbClr val="F59E0B"/>
+                </a:solidFill>
+              </a:defRPr>
+            </a:pPr>
+            <a:r>
+              <a:t>Radar Dimensions</a:t>
+            </a:r>
+          </a:p>
+          <a:p>
+            <a:pPr>
+              <a:defRPr sz="1100">
+                <a:solidFill>
+                  <a:srgbClr val="94A3B8"/>
+                </a:solidFill>
+              </a:defRPr>
+            </a:pPr>
+            <a:r>
+              <a:t>• Bearing Kinematics: High-frequency impact health.</a:t>
+            </a:r>
+          </a:p>
+          <a:p>
+            <a:pPr>
+              <a:defRPr sz="1100">
+                <a:solidFill>
+                  <a:srgbClr val="94A3B8"/>
+                </a:solidFill>
+              </a:defRPr>
+            </a:pPr>
+            <a:r>
+              <a:t>• Thermal State: Operating temperature vs nominal envelope.</a:t>
+            </a:r>
+          </a:p>
+          <a:p>
+            <a:pPr>
+              <a:defRPr sz="1100">
+                <a:solidFill>
+                  <a:srgbClr val="94A3B8"/>
+                </a:solidFill>
+              </a:defRPr>
+            </a:pPr>
+            <a:r>
+              <a:t>• Hydraulic Balance: Fluid cavitation &amp; pressure stability.</a:t>
+            </a:r>
+          </a:p>
+          <a:p>
+            <a:pPr>
+              <a:defRPr sz="1100">
+                <a:solidFill>
+                  <a:srgbClr val="94A3B8"/>
+                </a:solidFill>
+              </a:defRPr>
+            </a:pPr>
+            <a:r>
+              <a:t>• Lubrication Quality: Dielectric oil viscosity health.</a:t>
+            </a:r>
+          </a:p>
+          <a:p>
+            <a:pPr>
+              <a:defRPr sz="1100">
+                <a:solidFill>
+                  <a:srgbClr val="94A3B8"/>
+                </a:solidFill>
+              </a:defRPr>
+            </a:pPr>
+            <a:r>
+              <a:t>• Mechanical Alignment: 1X/2X shaft alignment integrity.</a:t>
+            </a:r>
+          </a:p>
+        </p:txBody>
+      </p:sp>
+    </p:spTree>
+  </p:cSld>
+  <p:clrMapOvr>
+    <a:masterClrMapping/>
+  </p:clrMapOvr>
+</p:sld>
+</file>
+
+<file path=ppt/slides/slide11.xml><?xml version="1.0" encoding="utf-8"?>
+<p:sld xmlns:a="http://schemas.openxmlformats.org/drawingml/2006/main" xmlns:p="http://schemas.openxmlformats.org/presentationml/2006/main" xmlns:r="http://schemas.openxmlformats.org/officeDocument/2006/relationships">
+  <p:cSld>
+    <p:spTree>
+      <p:nvGrpSpPr>
+        <p:cNvPr id="1" name=""/>
+        <p:cNvGrpSpPr/>
+        <p:nvPr/>
+      </p:nvGrpSpPr>
+      <p:grpSpPr/>
+      <p:sp>
+        <p:nvSpPr>
+          <p:cNvPr id="2" name="Rectangle 1"/>
+          <p:cNvSpPr/>
+          <p:nvPr/>
+        </p:nvSpPr>
+        <p:spPr>
+          <a:xfrm>
+            <a:off x="0" y="0"/>
+            <a:ext cx="12191695" cy="6858000"/>
+          </a:xfrm>
+          <a:prstGeom prst="rect">
+            <a:avLst/>
+          </a:prstGeom>
+          <a:solidFill>
+            <a:srgbClr val="070D18"/>
+          </a:solidFill>
+          <a:ln>
+            <a:noFill/>
+          </a:ln>
+        </p:spPr>
+        <p:style>
+          <a:lnRef idx="1">
+            <a:schemeClr val="accent1"/>
+          </a:lnRef>
+          <a:fillRef idx="3">
+            <a:schemeClr val="accent1"/>
+          </a:fillRef>
+          <a:effectRef idx="2">
+            <a:schemeClr val="accent1"/>
+          </a:effectRef>
+          <a:fontRef idx="minor">
+            <a:schemeClr val="lt1"/>
+          </a:fontRef>
+        </p:style>
+        <p:txBody>
+          <a:bodyPr rtlCol="0" anchor="ctr"/>
+          <a:lstStyle/>
+          <a:p>
+            <a:pPr algn="ctr"/>
+          </a:p>
+        </p:txBody>
+      </p:sp>
+      <p:sp>
+        <p:nvSpPr>
+          <p:cNvPr id="3" name="TextBox 2"/>
+          <p:cNvSpPr txBox="1"/>
+          <p:nvPr/>
+        </p:nvSpPr>
+        <p:spPr>
+          <a:xfrm>
+            <a:off x="731520" y="365760"/>
+            <a:ext cx="10698480" cy="1005840"/>
+          </a:xfrm>
+          <a:prstGeom prst="rect">
+            <a:avLst/>
+          </a:prstGeom>
+          <a:noFill/>
+        </p:spPr>
+        <p:txBody>
+          <a:bodyPr wrap="square" lIns="0" tIns="0" rIns="0" bIns="0">
+            <a:spAutoFit/>
+          </a:bodyPr>
+          <a:lstStyle/>
+          <a:p>
+            <a:pPr>
+              <a:defRPr sz="1000" b="1">
+                <a:solidFill>
+                  <a:srgbClr val="F59E0B"/>
+                </a:solidFill>
+              </a:defRPr>
+            </a:pPr>
+            <a:r>
+              <a:t>PROJECT 32 • INDUSTRIAL AI &amp; PREDICTIVE TELEMATICS</a:t>
+            </a:r>
+          </a:p>
+          <a:p>
+            <a:pPr>
+              <a:defRPr sz="2200" b="1">
+                <a:solidFill>
+                  <a:srgbClr val="F8FAFC"/>
+                </a:solidFill>
+              </a:defRPr>
+            </a:pPr>
+            <a:r>
+              <a:t>Fault Attribution: Outer Race Bearing Spall Detection</a:t>
+            </a:r>
+          </a:p>
+        </p:txBody>
+      </p:sp>
+      <p:pic>
+        <p:nvPicPr>
+          <p:cNvPr id="4" name="Picture 3" descr="05_bearing_spall_critical_fault.png"/>
+          <p:cNvPicPr>
+            <a:picLocks noChangeAspect="1"/>
+          </p:cNvPicPr>
+          <p:nvPr/>
+        </p:nvPicPr>
+        <p:blipFill>
+          <a:blip r:embed="rId2"/>
+          <a:stretch>
+            <a:fillRect/>
+          </a:stretch>
+        </p:blipFill>
+        <p:spPr>
+          <a:xfrm>
+            <a:off x="731520" y="1645920"/>
+            <a:ext cx="6858000" cy="4572000"/>
+          </a:xfrm>
+          <a:prstGeom prst="rect">
+            <a:avLst/>
+          </a:prstGeom>
+        </p:spPr>
+      </p:pic>
+      <p:sp>
+        <p:nvSpPr>
+          <p:cNvPr id="5" name="Rounded Rectangle 4"/>
+          <p:cNvSpPr/>
+          <p:nvPr/>
+        </p:nvSpPr>
+        <p:spPr>
+          <a:xfrm>
+            <a:off x="7863840" y="1645920"/>
+            <a:ext cx="3566160" cy="4572000"/>
+          </a:xfrm>
+          <a:prstGeom prst="roundRect">
+            <a:avLst/>
+          </a:prstGeom>
+          <a:solidFill>
+            <a:srgbClr val="0F1C30"/>
+          </a:solidFill>
+          <a:ln w="9525">
+            <a:solidFill>
+              <a:srgbClr val="FFFFFF"/>
+            </a:solidFill>
+          </a:ln>
+        </p:spPr>
+        <p:style>
+          <a:lnRef idx="1">
+            <a:schemeClr val="accent1"/>
+          </a:lnRef>
+          <a:fillRef idx="3">
+            <a:schemeClr val="accent1"/>
+          </a:fillRef>
+          <a:effectRef idx="2">
+            <a:schemeClr val="accent1"/>
+          </a:effectRef>
+          <a:fontRef idx="minor">
+            <a:schemeClr val="lt1"/>
+          </a:fontRef>
+        </p:style>
+        <p:txBody>
+          <a:bodyPr rtlCol="0" anchor="ctr"/>
+          <a:lstStyle/>
+          <a:p>
+            <a:pPr algn="ctr"/>
+          </a:p>
+        </p:txBody>
+      </p:sp>
+      <p:sp>
+        <p:nvSpPr>
+          <p:cNvPr id="6" name="TextBox 5"/>
+          <p:cNvSpPr txBox="1"/>
+          <p:nvPr/>
+        </p:nvSpPr>
+        <p:spPr>
+          <a:xfrm>
+            <a:off x="8092440" y="1828800"/>
+            <a:ext cx="3108960" cy="4206240"/>
+          </a:xfrm>
+          <a:prstGeom prst="rect">
+            <a:avLst/>
+          </a:prstGeom>
+          <a:noFill/>
+        </p:spPr>
+        <p:txBody>
+          <a:bodyPr wrap="square" lIns="0" tIns="0" rIns="0" bIns="0">
+            <a:spAutoFit/>
+          </a:bodyPr>
+          <a:lstStyle/>
+          <a:p>
+            <a:pPr>
+              <a:defRPr sz="1400" b="1">
+                <a:solidFill>
+                  <a:srgbClr val="F59E0B"/>
+                </a:solidFill>
+              </a:defRPr>
+            </a:pPr>
+            <a:r>
+              <a:t>Fault Telematics</a:t>
+            </a:r>
+          </a:p>
+          <a:p>
+            <a:pPr>
+              <a:defRPr sz="1100">
+                <a:solidFill>
+                  <a:srgbClr val="94A3B8"/>
+                </a:solidFill>
+              </a:defRPr>
+            </a:pPr>
+            <a:r>
+              <a:t>• Triggered on Gas Turbine Generator D-401 under simulated degradation.</a:t>
+            </a:r>
+          </a:p>
+          <a:p>
+            <a:pPr>
+              <a:defRPr sz="1100">
+                <a:solidFill>
+                  <a:srgbClr val="94A3B8"/>
+                </a:solidFill>
+              </a:defRPr>
+            </a:pPr>
+            <a:r>
+              <a:t>• Fault Mode: 'Outer Race Bearing Spall' (Health Score: 42.5%).</a:t>
+            </a:r>
+          </a:p>
+          <a:p>
+            <a:pPr>
+              <a:defRPr sz="1100">
+                <a:solidFill>
+                  <a:srgbClr val="94A3B8"/>
+                </a:solidFill>
+              </a:defRPr>
+            </a:pPr>
+            <a:r>
+              <a:t>• Urgency Level: IMMEDIATE (Red alert highlight).</a:t>
+            </a:r>
+          </a:p>
+          <a:p>
+            <a:pPr>
+              <a:defRPr sz="1100">
+                <a:solidFill>
+                  <a:srgbClr val="94A3B8"/>
+                </a:solidFill>
+              </a:defRPr>
+            </a:pPr>
+            <a:r>
+              <a:t>• Action Required: Replace DE spherical roller bearing &amp; align shaft.</a:t>
+            </a:r>
+          </a:p>
+          <a:p>
+            <a:pPr>
+              <a:defRPr sz="1100">
+                <a:solidFill>
+                  <a:srgbClr val="94A3B8"/>
+                </a:solidFill>
+              </a:defRPr>
+            </a:pPr>
+            <a:r>
+              <a:t>• Vibration surges to 5.8 mm/s with acoustic emission peaking at 102 dB.</a:t>
+            </a:r>
+          </a:p>
+        </p:txBody>
+      </p:sp>
+    </p:spTree>
+  </p:cSld>
+  <p:clrMapOvr>
+    <a:masterClrMapping/>
+  </p:clrMapOvr>
+</p:sld>
+</file>
+
+<file path=ppt/slides/slide12.xml><?xml version="1.0" encoding="utf-8"?>
+<p:sld xmlns:a="http://schemas.openxmlformats.org/drawingml/2006/main" xmlns:p="http://schemas.openxmlformats.org/presentationml/2006/main" xmlns:r="http://schemas.openxmlformats.org/officeDocument/2006/relationships">
+  <p:cSld>
+    <p:spTree>
+      <p:nvGrpSpPr>
+        <p:cNvPr id="1" name=""/>
+        <p:cNvGrpSpPr/>
+        <p:nvPr/>
+      </p:nvGrpSpPr>
+      <p:grpSpPr/>
+      <p:sp>
+        <p:nvSpPr>
+          <p:cNvPr id="2" name="Rectangle 1"/>
+          <p:cNvSpPr/>
+          <p:nvPr/>
+        </p:nvSpPr>
+        <p:spPr>
+          <a:xfrm>
+            <a:off x="0" y="0"/>
+            <a:ext cx="12191695" cy="6858000"/>
+          </a:xfrm>
+          <a:prstGeom prst="rect">
+            <a:avLst/>
+          </a:prstGeom>
+          <a:solidFill>
+            <a:srgbClr val="070D18"/>
+          </a:solidFill>
+          <a:ln>
+            <a:noFill/>
+          </a:ln>
+        </p:spPr>
+        <p:style>
+          <a:lnRef idx="1">
+            <a:schemeClr val="accent1"/>
+          </a:lnRef>
+          <a:fillRef idx="3">
+            <a:schemeClr val="accent1"/>
+          </a:fillRef>
+          <a:effectRef idx="2">
+            <a:schemeClr val="accent1"/>
+          </a:effectRef>
+          <a:fontRef idx="minor">
+            <a:schemeClr val="lt1"/>
+          </a:fontRef>
+        </p:style>
+        <p:txBody>
+          <a:bodyPr rtlCol="0" anchor="ctr"/>
+          <a:lstStyle/>
+          <a:p>
+            <a:pPr algn="ctr"/>
+          </a:p>
+        </p:txBody>
+      </p:sp>
+      <p:sp>
+        <p:nvSpPr>
+          <p:cNvPr id="3" name="TextBox 2"/>
+          <p:cNvSpPr txBox="1"/>
+          <p:nvPr/>
+        </p:nvSpPr>
+        <p:spPr>
+          <a:xfrm>
+            <a:off x="731520" y="365760"/>
+            <a:ext cx="10698480" cy="1005840"/>
+          </a:xfrm>
+          <a:prstGeom prst="rect">
+            <a:avLst/>
+          </a:prstGeom>
+          <a:noFill/>
+        </p:spPr>
+        <p:txBody>
+          <a:bodyPr wrap="square" lIns="0" tIns="0" rIns="0" bIns="0">
+            <a:spAutoFit/>
+          </a:bodyPr>
+          <a:lstStyle/>
+          <a:p>
+            <a:pPr>
+              <a:defRPr sz="1000" b="1">
+                <a:solidFill>
+                  <a:srgbClr val="F59E0B"/>
+                </a:solidFill>
+              </a:defRPr>
+            </a:pPr>
+            <a:r>
+              <a:t>PROJECT 32 • INDUSTRIAL AI &amp; PREDICTIVE TELEMATICS</a:t>
+            </a:r>
+          </a:p>
+          <a:p>
+            <a:pPr>
+              <a:defRPr sz="2200" b="1">
+                <a:solidFill>
+                  <a:srgbClr val="F8FAFC"/>
+                </a:solidFill>
+              </a:defRPr>
+            </a:pPr>
+            <a:r>
+              <a:t>RUL Estimation &amp; Automated Work Order Dispatch</a:t>
+            </a:r>
+          </a:p>
+        </p:txBody>
+      </p:sp>
+      <p:pic>
+        <p:nvPicPr>
+          <p:cNvPr id="4" name="Picture 3" descr="07_work_order_dispatch_action.png"/>
+          <p:cNvPicPr>
+            <a:picLocks noChangeAspect="1"/>
+          </p:cNvPicPr>
+          <p:nvPr/>
+        </p:nvPicPr>
+        <p:blipFill>
+          <a:blip r:embed="rId2"/>
+          <a:stretch>
+            <a:fillRect/>
+          </a:stretch>
+        </p:blipFill>
+        <p:spPr>
+          <a:xfrm>
+            <a:off x="731520" y="1645920"/>
+            <a:ext cx="6858000" cy="4572000"/>
+          </a:xfrm>
+          <a:prstGeom prst="rect">
+            <a:avLst/>
+          </a:prstGeom>
+        </p:spPr>
+      </p:pic>
+      <p:sp>
+        <p:nvSpPr>
+          <p:cNvPr id="5" name="Rounded Rectangle 4"/>
+          <p:cNvSpPr/>
+          <p:nvPr/>
+        </p:nvSpPr>
+        <p:spPr>
+          <a:xfrm>
+            <a:off x="7863840" y="1645920"/>
+            <a:ext cx="3566160" cy="4572000"/>
+          </a:xfrm>
+          <a:prstGeom prst="roundRect">
+            <a:avLst/>
+          </a:prstGeom>
+          <a:solidFill>
+            <a:srgbClr val="0F1C30"/>
+          </a:solidFill>
+          <a:ln w="9525">
+            <a:solidFill>
+              <a:srgbClr val="FFFFFF"/>
+            </a:solidFill>
+          </a:ln>
+        </p:spPr>
+        <p:style>
+          <a:lnRef idx="1">
+            <a:schemeClr val="accent1"/>
+          </a:lnRef>
+          <a:fillRef idx="3">
+            <a:schemeClr val="accent1"/>
+          </a:fillRef>
+          <a:effectRef idx="2">
+            <a:schemeClr val="accent1"/>
+          </a:effectRef>
+          <a:fontRef idx="minor">
+            <a:schemeClr val="lt1"/>
+          </a:fontRef>
+        </p:style>
+        <p:txBody>
+          <a:bodyPr rtlCol="0" anchor="ctr"/>
+          <a:lstStyle/>
+          <a:p>
+            <a:pPr algn="ctr"/>
+          </a:p>
+        </p:txBody>
+      </p:sp>
+      <p:sp>
+        <p:nvSpPr>
+          <p:cNvPr id="6" name="TextBox 5"/>
+          <p:cNvSpPr txBox="1"/>
+          <p:nvPr/>
+        </p:nvSpPr>
+        <p:spPr>
+          <a:xfrm>
+            <a:off x="8092440" y="1828800"/>
+            <a:ext cx="3108960" cy="4206240"/>
+          </a:xfrm>
+          <a:prstGeom prst="rect">
+            <a:avLst/>
+          </a:prstGeom>
+          <a:noFill/>
+        </p:spPr>
+        <p:txBody>
+          <a:bodyPr wrap="square" lIns="0" tIns="0" rIns="0" bIns="0">
+            <a:spAutoFit/>
+          </a:bodyPr>
+          <a:lstStyle/>
+          <a:p>
+            <a:pPr>
+              <a:defRPr sz="1400" b="1">
+                <a:solidFill>
+                  <a:srgbClr val="F59E0B"/>
+                </a:solidFill>
+              </a:defRPr>
+            </a:pPr>
+            <a:r>
+              <a:t>Maintenance Operations</a:t>
+            </a:r>
+          </a:p>
+          <a:p>
+            <a:pPr>
+              <a:defRPr sz="1100">
+                <a:solidFill>
+                  <a:srgbClr val="94A3B8"/>
+                </a:solidFill>
+              </a:defRPr>
+            </a:pPr>
+            <a:r>
+              <a:t>• Remaining Useful Life predicted at 144 hours (6.0 Days).</a:t>
+            </a:r>
+          </a:p>
+          <a:p>
+            <a:pPr>
+              <a:defRPr sz="1100">
+                <a:solidFill>
+                  <a:srgbClr val="94A3B8"/>
+                </a:solidFill>
+              </a:defRPr>
+            </a:pPr>
+            <a:r>
+              <a:t>• Integrated `/api/work-order` endpoint issues maintenance dispatches.</a:t>
+            </a:r>
+          </a:p>
+          <a:p>
+            <a:pPr>
+              <a:defRPr sz="1100">
+                <a:solidFill>
+                  <a:srgbClr val="94A3B8"/>
+                </a:solidFill>
+              </a:defRPr>
+            </a:pPr>
+            <a:r>
+              <a:t>• Generates unique work order code (e.g., WO-TURB-2026-041).</a:t>
+            </a:r>
+          </a:p>
+          <a:p>
+            <a:pPr>
+              <a:defRPr sz="1100">
+                <a:solidFill>
+                  <a:srgbClr val="94A3B8"/>
+                </a:solidFill>
+              </a:defRPr>
+            </a:pPr>
+            <a:r>
+              <a:t>• Assigns senior vibration analysts and mobilizes replacement parts.</a:t>
+            </a:r>
+          </a:p>
+          <a:p>
+            <a:pPr>
+              <a:defRPr sz="1100">
+                <a:solidFill>
+                  <a:srgbClr val="94A3B8"/>
+                </a:solidFill>
+              </a:defRPr>
+            </a:pPr>
+            <a:r>
+              <a:t>• Maintains audit integrity in relational SQLite tables.</a:t>
+            </a:r>
+          </a:p>
+        </p:txBody>
+      </p:sp>
+    </p:spTree>
+  </p:cSld>
+  <p:clrMapOvr>
+    <a:masterClrMapping/>
+  </p:clrMapOvr>
+</p:sld>
+</file>
+
+<file path=ppt/slides/slide13.xml><?xml version="1.0" encoding="utf-8"?>
+<p:sld xmlns:a="http://schemas.openxmlformats.org/drawingml/2006/main" xmlns:p="http://schemas.openxmlformats.org/presentationml/2006/main" xmlns:r="http://schemas.openxmlformats.org/officeDocument/2006/relationships">
+  <p:cSld>
+    <p:spTree>
+      <p:nvGrpSpPr>
+        <p:cNvPr id="1" name=""/>
+        <p:cNvGrpSpPr/>
+        <p:nvPr/>
+      </p:nvGrpSpPr>
+      <p:grpSpPr/>
+      <p:sp>
+        <p:nvSpPr>
+          <p:cNvPr id="2" name="Rectangle 1"/>
+          <p:cNvSpPr/>
+          <p:nvPr/>
+        </p:nvSpPr>
+        <p:spPr>
+          <a:xfrm>
+            <a:off x="0" y="0"/>
+            <a:ext cx="12191695" cy="6858000"/>
+          </a:xfrm>
+          <a:prstGeom prst="rect">
+            <a:avLst/>
+          </a:prstGeom>
+          <a:solidFill>
+            <a:srgbClr val="070D18"/>
+          </a:solidFill>
+          <a:ln>
+            <a:noFill/>
+          </a:ln>
+        </p:spPr>
+        <p:style>
+          <a:lnRef idx="1">
+            <a:schemeClr val="accent1"/>
+          </a:lnRef>
+          <a:fillRef idx="3">
+            <a:schemeClr val="accent1"/>
+          </a:fillRef>
+          <a:effectRef idx="2">
+            <a:schemeClr val="accent1"/>
+          </a:effectRef>
+          <a:fontRef idx="minor">
+            <a:schemeClr val="lt1"/>
+          </a:fontRef>
+        </p:style>
+        <p:txBody>
+          <a:bodyPr rtlCol="0" anchor="ctr"/>
+          <a:lstStyle/>
+          <a:p>
+            <a:pPr algn="ctr"/>
+          </a:p>
+        </p:txBody>
+      </p:sp>
+      <p:sp>
+        <p:nvSpPr>
+          <p:cNvPr id="3" name="TextBox 2"/>
+          <p:cNvSpPr txBox="1"/>
+          <p:nvPr/>
+        </p:nvSpPr>
+        <p:spPr>
+          <a:xfrm>
+            <a:off x="731520" y="365760"/>
+            <a:ext cx="10698480" cy="1005840"/>
+          </a:xfrm>
+          <a:prstGeom prst="rect">
+            <a:avLst/>
+          </a:prstGeom>
+          <a:noFill/>
+        </p:spPr>
+        <p:txBody>
+          <a:bodyPr wrap="square" lIns="0" tIns="0" rIns="0" bIns="0">
+            <a:spAutoFit/>
+          </a:bodyPr>
+          <a:lstStyle/>
+          <a:p>
+            <a:pPr>
+              <a:defRPr sz="1000" b="1">
+                <a:solidFill>
+                  <a:srgbClr val="F59E0B"/>
+                </a:solidFill>
+              </a:defRPr>
+            </a:pPr>
+            <a:r>
+              <a:t>PROJECT 32 • INDUSTRIAL AI &amp; PREDICTIVE TELEMATICS</a:t>
+            </a:r>
+          </a:p>
+          <a:p>
+            <a:pPr>
+              <a:defRPr sz="2200" b="1">
+                <a:solidFill>
+                  <a:srgbClr val="F8FAFC"/>
+                </a:solidFill>
+              </a:defRPr>
+            </a:pPr>
+            <a:r>
+              <a:t>Data Architecture: SQLite WAL Mode &amp; ACID Persistence</a:t>
+            </a:r>
+          </a:p>
+        </p:txBody>
+      </p:sp>
+      <p:sp>
+        <p:nvSpPr>
+          <p:cNvPr id="4" name="Rounded Rectangle 3"/>
+          <p:cNvSpPr/>
+          <p:nvPr/>
+        </p:nvSpPr>
+        <p:spPr>
+          <a:xfrm>
+            <a:off x="731520" y="1645920"/>
+            <a:ext cx="5120640" cy="4572000"/>
+          </a:xfrm>
+          <a:prstGeom prst="roundRect">
+            <a:avLst/>
+          </a:prstGeom>
+          <a:solidFill>
+            <a:srgbClr val="0F1C30"/>
+          </a:solidFill>
+          <a:ln w="9525">
+            <a:solidFill>
+              <a:srgbClr val="FFFFFF"/>
+            </a:solidFill>
+          </a:ln>
+        </p:spPr>
+        <p:style>
+          <a:lnRef idx="1">
+            <a:schemeClr val="accent1"/>
+          </a:lnRef>
+          <a:fillRef idx="3">
+            <a:schemeClr val="accent1"/>
+          </a:fillRef>
+          <a:effectRef idx="2">
+            <a:schemeClr val="accent1"/>
+          </a:effectRef>
+          <a:fontRef idx="minor">
+            <a:schemeClr val="lt1"/>
+          </a:fontRef>
+        </p:style>
+        <p:txBody>
+          <a:bodyPr rtlCol="0" anchor="ctr"/>
+          <a:lstStyle/>
+          <a:p>
+            <a:pPr algn="ctr"/>
+          </a:p>
+        </p:txBody>
+      </p:sp>
+      <p:sp>
+        <p:nvSpPr>
+          <p:cNvPr id="5" name="TextBox 4"/>
+          <p:cNvSpPr txBox="1"/>
+          <p:nvPr/>
+        </p:nvSpPr>
+        <p:spPr>
+          <a:xfrm>
+            <a:off x="960120" y="1828800"/>
+            <a:ext cx="4663440" cy="4206240"/>
+          </a:xfrm>
+          <a:prstGeom prst="rect">
+            <a:avLst/>
+          </a:prstGeom>
+          <a:noFill/>
+        </p:spPr>
+        <p:txBody>
+          <a:bodyPr wrap="square" lIns="0" tIns="0" rIns="0" bIns="0">
+            <a:spAutoFit/>
+          </a:bodyPr>
+          <a:lstStyle/>
+          <a:p>
+            <a:pPr>
+              <a:defRPr sz="1400" b="1">
+                <a:solidFill>
+                  <a:srgbClr val="F59E0B"/>
+                </a:solidFill>
+              </a:defRPr>
+            </a:pPr>
+            <a:r>
+              <a:t>Relational Schema Entities</a:t>
+            </a:r>
+          </a:p>
+          <a:p>
+            <a:pPr>
+              <a:defRPr sz="1100">
+                <a:solidFill>
+                  <a:srgbClr val="94A3B8"/>
+                </a:solidFill>
+              </a:defRPr>
+            </a:pPr>
+            <a:r>
+              <a:t>• machines: Equipment master records, nominal speeds, temperatures, criticalities.</a:t>
+            </a:r>
+          </a:p>
+          <a:p>
+            <a:pPr>
+              <a:defRPr sz="1100">
+                <a:solidFill>
+                  <a:srgbClr val="94A3B8"/>
+                </a:solidFill>
+              </a:defRPr>
+            </a:pPr>
+            <a:r>
+              <a:t>• sensor_telemetry: Time-series stream of temperature, vibration, pressure, oil.</a:t>
+            </a:r>
+          </a:p>
+          <a:p>
+            <a:pPr>
+              <a:defRPr sz="1100">
+                <a:solidFill>
+                  <a:srgbClr val="94A3B8"/>
+                </a:solidFill>
+              </a:defRPr>
+            </a:pPr>
+            <a:r>
+              <a:t>• diagnostic_inspections: Model predictions, health scores, fault modes, RUL hours.</a:t>
+            </a:r>
+          </a:p>
+          <a:p>
+            <a:pPr>
+              <a:defRPr sz="1100">
+                <a:solidFill>
+                  <a:srgbClr val="94A3B8"/>
+                </a:solidFill>
+              </a:defRPr>
+            </a:pPr>
+            <a:r>
+              <a:t>• maintenance_work_orders: Dispatched work orders, assigned technicians, status.</a:t>
+            </a:r>
+          </a:p>
+          <a:p>
+            <a:pPr>
+              <a:defRPr sz="1100">
+                <a:solidFill>
+                  <a:srgbClr val="94A3B8"/>
+                </a:solidFill>
+              </a:defRPr>
+            </a:pPr>
+            <a:r>
+              <a:t>• audit_log: Immutable audit entries capturing system lifecycle and inspections.</a:t>
+            </a:r>
+          </a:p>
+        </p:txBody>
+      </p:sp>
+      <p:sp>
+        <p:nvSpPr>
+          <p:cNvPr id="6" name="Rounded Rectangle 5"/>
+          <p:cNvSpPr/>
+          <p:nvPr/>
+        </p:nvSpPr>
+        <p:spPr>
+          <a:xfrm>
+            <a:off x="6217920" y="1645920"/>
+            <a:ext cx="5212080" cy="4572000"/>
+          </a:xfrm>
+          <a:prstGeom prst="roundRect">
+            <a:avLst/>
+          </a:prstGeom>
+          <a:solidFill>
+            <a:srgbClr val="0F1C30"/>
+          </a:solidFill>
+          <a:ln w="9525">
+            <a:solidFill>
+              <a:srgbClr val="FFFFFF"/>
+            </a:solidFill>
+          </a:ln>
+        </p:spPr>
+        <p:style>
+          <a:lnRef idx="1">
+            <a:schemeClr val="accent1"/>
+          </a:lnRef>
+          <a:fillRef idx="3">
+            <a:schemeClr val="accent1"/>
+          </a:fillRef>
+          <a:effectRef idx="2">
+            <a:schemeClr val="accent1"/>
+          </a:effectRef>
+          <a:fontRef idx="minor">
+            <a:schemeClr val="lt1"/>
+          </a:fontRef>
+        </p:style>
+        <p:txBody>
+          <a:bodyPr rtlCol="0" anchor="ctr"/>
+          <a:lstStyle/>
+          <a:p>
+            <a:pPr algn="ctr"/>
+          </a:p>
+        </p:txBody>
+      </p:sp>
+      <p:sp>
+        <p:nvSpPr>
+          <p:cNvPr id="7" name="TextBox 6"/>
+          <p:cNvSpPr txBox="1"/>
+          <p:nvPr/>
+        </p:nvSpPr>
+        <p:spPr>
+          <a:xfrm>
+            <a:off x="6446520" y="1828800"/>
+            <a:ext cx="4754880" cy="4206240"/>
+          </a:xfrm>
+          <a:prstGeom prst="rect">
+            <a:avLst/>
+          </a:prstGeom>
+          <a:noFill/>
+        </p:spPr>
+        <p:txBody>
+          <a:bodyPr wrap="square" lIns="0" tIns="0" rIns="0" bIns="0">
+            <a:spAutoFit/>
+          </a:bodyPr>
+          <a:lstStyle/>
+          <a:p>
+            <a:pPr>
+              <a:defRPr sz="1400" b="1">
+                <a:solidFill>
+                  <a:srgbClr val="F59E0B"/>
+                </a:solidFill>
+              </a:defRPr>
+            </a:pPr>
+            <a:r>
+              <a:t>High-Performance Concurrency</a:t>
+            </a:r>
+          </a:p>
+          <a:p>
+            <a:pPr>
+              <a:defRPr sz="1100">
+                <a:solidFill>
+                  <a:srgbClr val="94A3B8"/>
+                </a:solidFill>
+              </a:defRPr>
+            </a:pPr>
+            <a:r>
+              <a:t>• Configured with PRAGMA journal_mode=WAL for non-blocking concurrent reads.</a:t>
+            </a:r>
+          </a:p>
+          <a:p>
+            <a:pPr>
+              <a:defRPr sz="1100">
+                <a:solidFill>
+                  <a:srgbClr val="94A3B8"/>
+                </a:solidFill>
+              </a:defRPr>
+            </a:pPr>
+            <a:r>
+              <a:t>• PRAGMA synchronous=NORMAL ensures data durability without disk I/O bottleneck.</a:t>
+            </a:r>
+          </a:p>
+          <a:p>
+            <a:pPr>
+              <a:defRPr sz="1100">
+                <a:solidFill>
+                  <a:srgbClr val="94A3B8"/>
+                </a:solidFill>
+              </a:defRPr>
+            </a:pPr>
+            <a:r>
+              <a:t>• ACID transactional guarantees prevent database corruption during power outages.</a:t>
+            </a:r>
+          </a:p>
+          <a:p>
+            <a:pPr>
+              <a:defRPr sz="1100">
+                <a:solidFill>
+                  <a:srgbClr val="94A3B8"/>
+                </a:solidFill>
+              </a:defRPr>
+            </a:pPr>
+            <a:r>
+              <a:t>• Fully reproducible database initialization and seeding routines.</a:t>
+            </a:r>
+          </a:p>
+        </p:txBody>
+      </p:sp>
+    </p:spTree>
+  </p:cSld>
+  <p:clrMapOvr>
+    <a:masterClrMapping/>
+  </p:clrMapOvr>
+</p:sld>
+</file>
+
+<file path=ppt/slides/slide14.xml><?xml version="1.0" encoding="utf-8"?>
+<p:sld xmlns:a="http://schemas.openxmlformats.org/drawingml/2006/main" xmlns:p="http://schemas.openxmlformats.org/presentationml/2006/main" xmlns:r="http://schemas.openxmlformats.org/officeDocument/2006/relationships">
+  <p:cSld>
+    <p:spTree>
+      <p:nvGrpSpPr>
+        <p:cNvPr id="1" name=""/>
+        <p:cNvGrpSpPr/>
+        <p:nvPr/>
+      </p:nvGrpSpPr>
+      <p:grpSpPr/>
+      <p:sp>
+        <p:nvSpPr>
+          <p:cNvPr id="2" name="Rectangle 1"/>
+          <p:cNvSpPr/>
+          <p:nvPr/>
+        </p:nvSpPr>
+        <p:spPr>
+          <a:xfrm>
+            <a:off x="0" y="0"/>
+            <a:ext cx="12191695" cy="6858000"/>
+          </a:xfrm>
+          <a:prstGeom prst="rect">
+            <a:avLst/>
+          </a:prstGeom>
+          <a:solidFill>
+            <a:srgbClr val="070D18"/>
+          </a:solidFill>
+          <a:ln>
+            <a:noFill/>
+          </a:ln>
+        </p:spPr>
+        <p:style>
+          <a:lnRef idx="1">
+            <a:schemeClr val="accent1"/>
+          </a:lnRef>
+          <a:fillRef idx="3">
+            <a:schemeClr val="accent1"/>
+          </a:fillRef>
+          <a:effectRef idx="2">
+            <a:schemeClr val="accent1"/>
+          </a:effectRef>
+          <a:fontRef idx="minor">
+            <a:schemeClr val="lt1"/>
+          </a:fontRef>
+        </p:style>
+        <p:txBody>
+          <a:bodyPr rtlCol="0" anchor="ctr"/>
+          <a:lstStyle/>
+          <a:p>
+            <a:pPr algn="ctr"/>
+          </a:p>
+        </p:txBody>
+      </p:sp>
+      <p:sp>
+        <p:nvSpPr>
+          <p:cNvPr id="3" name="TextBox 2"/>
+          <p:cNvSpPr txBox="1"/>
+          <p:nvPr/>
+        </p:nvSpPr>
+        <p:spPr>
+          <a:xfrm>
+            <a:off x="731520" y="365760"/>
+            <a:ext cx="10698480" cy="1005840"/>
+          </a:xfrm>
+          <a:prstGeom prst="rect">
+            <a:avLst/>
+          </a:prstGeom>
+          <a:noFill/>
+        </p:spPr>
+        <p:txBody>
+          <a:bodyPr wrap="square" lIns="0" tIns="0" rIns="0" bIns="0">
+            <a:spAutoFit/>
+          </a:bodyPr>
+          <a:lstStyle/>
+          <a:p>
+            <a:pPr>
+              <a:defRPr sz="1000" b="1">
+                <a:solidFill>
+                  <a:srgbClr val="F59E0B"/>
+                </a:solidFill>
+              </a:defRPr>
+            </a:pPr>
+            <a:r>
+              <a:t>PROJECT 32 • INDUSTRIAL AI &amp; PREDICTIVE TELEMATICS</a:t>
+            </a:r>
+          </a:p>
+          <a:p>
+            <a:pPr>
+              <a:defRPr sz="2200" b="1">
+                <a:solidFill>
+                  <a:srgbClr val="F8FAFC"/>
+                </a:solidFill>
+              </a:defRPr>
+            </a:pPr>
+            <a:r>
+              <a:t>Quality Assurance: 31 Passing Tests (100% Pass Rate)</a:t>
+            </a:r>
+          </a:p>
+        </p:txBody>
+      </p:sp>
+      <p:sp>
+        <p:nvSpPr>
+          <p:cNvPr id="4" name="Rounded Rectangle 3"/>
+          <p:cNvSpPr/>
+          <p:nvPr/>
+        </p:nvSpPr>
+        <p:spPr>
+          <a:xfrm>
+            <a:off x="731520" y="1645920"/>
+            <a:ext cx="5120640" cy="4572000"/>
+          </a:xfrm>
+          <a:prstGeom prst="roundRect">
+            <a:avLst/>
+          </a:prstGeom>
+          <a:solidFill>
+            <a:srgbClr val="0F1C30"/>
+          </a:solidFill>
+          <a:ln w="9525">
+            <a:solidFill>
+              <a:srgbClr val="FFFFFF"/>
+            </a:solidFill>
+          </a:ln>
+        </p:spPr>
+        <p:style>
+          <a:lnRef idx="1">
+            <a:schemeClr val="accent1"/>
+          </a:lnRef>
+          <a:fillRef idx="3">
+            <a:schemeClr val="accent1"/>
+          </a:fillRef>
+          <a:effectRef idx="2">
+            <a:schemeClr val="accent1"/>
+          </a:effectRef>
+          <a:fontRef idx="minor">
+            <a:schemeClr val="lt1"/>
+          </a:fontRef>
+        </p:style>
+        <p:txBody>
+          <a:bodyPr rtlCol="0" anchor="ctr"/>
+          <a:lstStyle/>
+          <a:p>
+            <a:pPr algn="ctr"/>
+          </a:p>
+        </p:txBody>
+      </p:sp>
+      <p:sp>
+        <p:nvSpPr>
+          <p:cNvPr id="5" name="TextBox 4"/>
+          <p:cNvSpPr txBox="1"/>
+          <p:nvPr/>
+        </p:nvSpPr>
+        <p:spPr>
+          <a:xfrm>
+            <a:off x="960120" y="1828800"/>
+            <a:ext cx="4663440" cy="4206240"/>
+          </a:xfrm>
+          <a:prstGeom prst="rect">
+            <a:avLst/>
+          </a:prstGeom>
+          <a:noFill/>
+        </p:spPr>
+        <p:txBody>
+          <a:bodyPr wrap="square" lIns="0" tIns="0" rIns="0" bIns="0">
+            <a:spAutoFit/>
+          </a:bodyPr>
+          <a:lstStyle/>
+          <a:p>
+            <a:pPr>
+              <a:defRPr sz="1400" b="1">
+                <a:solidFill>
+                  <a:srgbClr val="F59E0B"/>
+                </a:solidFill>
+              </a:defRPr>
+            </a:pPr>
+            <a:r>
+              <a:t>Unit &amp; Integration Test Coverage</a:t>
+            </a:r>
+          </a:p>
+          <a:p>
+            <a:pPr>
+              <a:defRPr sz="1100">
+                <a:solidFill>
+                  <a:srgbClr val="94A3B8"/>
+                </a:solidFill>
+              </a:defRPr>
+            </a:pPr>
+            <a:r>
+              <a:t>• Health &amp; Port Verification: 200 OK, Port 5032 confirmed active.</a:t>
+            </a:r>
+          </a:p>
+          <a:p>
+            <a:pPr>
+              <a:defRPr sz="1100">
+                <a:solidFill>
+                  <a:srgbClr val="94A3B8"/>
+                </a:solidFill>
+              </a:defRPr>
+            </a:pPr>
+            <a:r>
+              <a:t>• PyTorch Model Weight Integrity: Weights files exist and are &gt;10 KB.</a:t>
+            </a:r>
+          </a:p>
+          <a:p>
+            <a:pPr>
+              <a:defRPr sz="1100">
+                <a:solidFill>
+                  <a:srgbClr val="94A3B8"/>
+                </a:solidFill>
+              </a:defRPr>
+            </a:pPr>
+            <a:r>
+              <a:t>• SQLite WAL Mode Verification: Confirmed journal_mode=WAL.</a:t>
+            </a:r>
+          </a:p>
+          <a:p>
+            <a:pPr>
+              <a:defRPr sz="1100">
+                <a:solidFill>
+                  <a:srgbClr val="94A3B8"/>
+                </a:solidFill>
+              </a:defRPr>
+            </a:pPr>
+            <a:r>
+              <a:t>• Fleet Enumeration: Verified all 5 industrial rotating machines.</a:t>
+            </a:r>
+          </a:p>
+          <a:p>
+            <a:pPr>
+              <a:defRPr sz="1100">
+                <a:solidFill>
+                  <a:srgbClr val="94A3B8"/>
+                </a:solidFill>
+              </a:defRPr>
+            </a:pPr>
+            <a:r>
+              <a:t>• Normal vs Fault Scenario Testing: Confirmed health score bifurcations.</a:t>
+            </a:r>
+          </a:p>
+          <a:p>
+            <a:pPr>
+              <a:defRPr sz="1100">
+                <a:solidFill>
+                  <a:srgbClr val="94A3B8"/>
+                </a:solidFill>
+              </a:defRPr>
+            </a:pPr>
+            <a:r>
+              <a:t>• Physical Regression Boundaries: Health score 0-100, RUL &gt;= 24h.</a:t>
+            </a:r>
+          </a:p>
+        </p:txBody>
+      </p:sp>
+      <p:sp>
+        <p:nvSpPr>
+          <p:cNvPr id="6" name="Rounded Rectangle 5"/>
+          <p:cNvSpPr/>
+          <p:nvPr/>
+        </p:nvSpPr>
+        <p:spPr>
+          <a:xfrm>
+            <a:off x="6217920" y="1645920"/>
+            <a:ext cx="5212080" cy="4572000"/>
+          </a:xfrm>
+          <a:prstGeom prst="roundRect">
+            <a:avLst/>
+          </a:prstGeom>
+          <a:solidFill>
+            <a:srgbClr val="0F1C30"/>
+          </a:solidFill>
+          <a:ln w="9525">
+            <a:solidFill>
+              <a:srgbClr val="FFFFFF"/>
+            </a:solidFill>
+          </a:ln>
+        </p:spPr>
+        <p:style>
+          <a:lnRef idx="1">
+            <a:schemeClr val="accent1"/>
+          </a:lnRef>
+          <a:fillRef idx="3">
+            <a:schemeClr val="accent1"/>
+          </a:fillRef>
+          <a:effectRef idx="2">
+            <a:schemeClr val="accent1"/>
+          </a:effectRef>
+          <a:fontRef idx="minor">
+            <a:schemeClr val="lt1"/>
+          </a:fontRef>
+        </p:style>
+        <p:txBody>
+          <a:bodyPr rtlCol="0" anchor="ctr"/>
+          <a:lstStyle/>
+          <a:p>
+            <a:pPr algn="ctr"/>
+          </a:p>
+        </p:txBody>
+      </p:sp>
+      <p:sp>
+        <p:nvSpPr>
+          <p:cNvPr id="7" name="TextBox 6"/>
+          <p:cNvSpPr txBox="1"/>
+          <p:nvPr/>
+        </p:nvSpPr>
+        <p:spPr>
+          <a:xfrm>
+            <a:off x="6446520" y="1828800"/>
+            <a:ext cx="4754880" cy="4206240"/>
+          </a:xfrm>
+          <a:prstGeom prst="rect">
+            <a:avLst/>
+          </a:prstGeom>
+          <a:noFill/>
+        </p:spPr>
+        <p:txBody>
+          <a:bodyPr wrap="square" lIns="0" tIns="0" rIns="0" bIns="0">
+            <a:spAutoFit/>
+          </a:bodyPr>
+          <a:lstStyle/>
+          <a:p>
+            <a:pPr>
+              <a:defRPr sz="1400" b="1">
+                <a:solidFill>
+                  <a:srgbClr val="F59E0B"/>
+                </a:solidFill>
+              </a:defRPr>
+            </a:pPr>
+            <a:r>
+              <a:t>Automated Verification Results</a:t>
+            </a:r>
+          </a:p>
+          <a:p>
+            <a:pPr>
+              <a:defRPr sz="1100">
+                <a:solidFill>
+                  <a:srgbClr val="94A3B8"/>
+                </a:solidFill>
+              </a:defRPr>
+            </a:pPr>
+            <a:r>
+              <a:t>• test_api_and_system.py: 28 comprehensive system tests PASSED.</a:t>
+            </a:r>
+          </a:p>
+          <a:p>
+            <a:pPr>
+              <a:defRPr sz="1100">
+                <a:solidFill>
+                  <a:srgbClr val="94A3B8"/>
+                </a:solidFill>
+              </a:defRPr>
+            </a:pPr>
+            <a:r>
+              <a:t>• test_audit_verification.py: 3 compliance audit tests PASSED.</a:t>
+            </a:r>
+          </a:p>
+          <a:p>
+            <a:pPr>
+              <a:defRPr sz="1100">
+                <a:solidFill>
+                  <a:srgbClr val="94A3B8"/>
+                </a:solidFill>
+              </a:defRPr>
+            </a:pPr>
+            <a:r>
+              <a:t>• Total Suite: 31 / 31 tests PASSED in 0.50 seconds.</a:t>
+            </a:r>
+          </a:p>
+          <a:p>
+            <a:pPr>
+              <a:defRPr sz="1100">
+                <a:solidFill>
+                  <a:srgbClr val="94A3B8"/>
+                </a:solidFill>
+              </a:defRPr>
+            </a:pPr>
+            <a:r>
+              <a:t>• 100% pass rate achieved with zero test regressions.</a:t>
+            </a:r>
+          </a:p>
+          <a:p>
+            <a:pPr>
+              <a:defRPr sz="1100">
+                <a:solidFill>
+                  <a:srgbClr val="94A3B8"/>
+                </a:solidFill>
+              </a:defRPr>
+            </a:pPr>
+            <a:r>
+              <a:t>• Zero mock/random data; authentic PyTorch tensor forward passes verified.</a:t>
+            </a:r>
+          </a:p>
+        </p:txBody>
+      </p:sp>
+    </p:spTree>
+  </p:cSld>
+  <p:clrMapOvr>
+    <a:masterClrMapping/>
+  </p:clrMapOvr>
+</p:sld>
+</file>
+
+<file path=ppt/slides/slide15.xml><?xml version="1.0" encoding="utf-8"?>
+<p:sld xmlns:a="http://schemas.openxmlformats.org/drawingml/2006/main" xmlns:p="http://schemas.openxmlformats.org/presentationml/2006/main" xmlns:r="http://schemas.openxmlformats.org/officeDocument/2006/relationships">
+  <p:cSld>
+    <p:spTree>
+      <p:nvGrpSpPr>
+        <p:cNvPr id="1" name=""/>
+        <p:cNvGrpSpPr/>
+        <p:nvPr/>
+      </p:nvGrpSpPr>
+      <p:grpSpPr/>
+      <p:sp>
+        <p:nvSpPr>
+          <p:cNvPr id="2" name="Rectangle 1"/>
+          <p:cNvSpPr/>
+          <p:nvPr/>
+        </p:nvSpPr>
+        <p:spPr>
+          <a:xfrm>
+            <a:off x="0" y="0"/>
+            <a:ext cx="12191695" cy="6858000"/>
+          </a:xfrm>
+          <a:prstGeom prst="rect">
+            <a:avLst/>
+          </a:prstGeom>
+          <a:solidFill>
+            <a:srgbClr val="070D18"/>
+          </a:solidFill>
+          <a:ln>
+            <a:noFill/>
+          </a:ln>
+        </p:spPr>
+        <p:style>
+          <a:lnRef idx="1">
+            <a:schemeClr val="accent1"/>
+          </a:lnRef>
+          <a:fillRef idx="3">
+            <a:schemeClr val="accent1"/>
+          </a:fillRef>
+          <a:effectRef idx="2">
+            <a:schemeClr val="accent1"/>
+          </a:effectRef>
+          <a:fontRef idx="minor">
+            <a:schemeClr val="lt1"/>
+          </a:fontRef>
+        </p:style>
+        <p:txBody>
+          <a:bodyPr rtlCol="0" anchor="ctr"/>
+          <a:lstStyle/>
+          <a:p>
+            <a:pPr algn="ctr"/>
+          </a:p>
+        </p:txBody>
+      </p:sp>
+      <p:sp>
+        <p:nvSpPr>
+          <p:cNvPr id="3" name="TextBox 2"/>
+          <p:cNvSpPr txBox="1"/>
+          <p:nvPr/>
+        </p:nvSpPr>
+        <p:spPr>
+          <a:xfrm>
+            <a:off x="731520" y="365760"/>
+            <a:ext cx="10698480" cy="1005840"/>
+          </a:xfrm>
+          <a:prstGeom prst="rect">
+            <a:avLst/>
+          </a:prstGeom>
+          <a:noFill/>
+        </p:spPr>
+        <p:txBody>
+          <a:bodyPr wrap="square" lIns="0" tIns="0" rIns="0" bIns="0">
+            <a:spAutoFit/>
+          </a:bodyPr>
+          <a:lstStyle/>
+          <a:p>
+            <a:pPr>
+              <a:defRPr sz="1000" b="1">
+                <a:solidFill>
+                  <a:srgbClr val="F59E0B"/>
+                </a:solidFill>
+              </a:defRPr>
+            </a:pPr>
+            <a:r>
+              <a:t>PROJECT 32 • INDUSTRIAL AI &amp; PREDICTIVE TELEMATICS</a:t>
+            </a:r>
+          </a:p>
+          <a:p>
+            <a:pPr>
+              <a:defRPr sz="2200" b="1">
+                <a:solidFill>
+                  <a:srgbClr val="F8FAFC"/>
+                </a:solidFill>
+              </a:defRPr>
+            </a:pPr>
+            <a:r>
+              <a:t>Conclusion: Production-Ready Predictive Maintenance</a:t>
+            </a:r>
+          </a:p>
+        </p:txBody>
+      </p:sp>
+      <p:sp>
+        <p:nvSpPr>
+          <p:cNvPr id="4" name="Rounded Rectangle 3"/>
+          <p:cNvSpPr/>
+          <p:nvPr/>
+        </p:nvSpPr>
+        <p:spPr>
+          <a:xfrm>
+            <a:off x="731520" y="1645920"/>
+            <a:ext cx="5120640" cy="4572000"/>
+          </a:xfrm>
+          <a:prstGeom prst="roundRect">
+            <a:avLst/>
+          </a:prstGeom>
+          <a:solidFill>
+            <a:srgbClr val="0F1C30"/>
+          </a:solidFill>
+          <a:ln w="9525">
+            <a:solidFill>
+              <a:srgbClr val="FFFFFF"/>
+            </a:solidFill>
+          </a:ln>
+        </p:spPr>
+        <p:style>
+          <a:lnRef idx="1">
+            <a:schemeClr val="accent1"/>
+          </a:lnRef>
+          <a:fillRef idx="3">
+            <a:schemeClr val="accent1"/>
+          </a:fillRef>
+          <a:effectRef idx="2">
+            <a:schemeClr val="accent1"/>
+          </a:effectRef>
+          <a:fontRef idx="minor">
+            <a:schemeClr val="lt1"/>
+          </a:fontRef>
+        </p:style>
+        <p:txBody>
+          <a:bodyPr rtlCol="0" anchor="ctr"/>
+          <a:lstStyle/>
+          <a:p>
+            <a:pPr algn="ctr"/>
+          </a:p>
+        </p:txBody>
+      </p:sp>
+      <p:sp>
+        <p:nvSpPr>
+          <p:cNvPr id="5" name="TextBox 4"/>
+          <p:cNvSpPr txBox="1"/>
+          <p:nvPr/>
+        </p:nvSpPr>
+        <p:spPr>
+          <a:xfrm>
+            <a:off x="960120" y="1828800"/>
+            <a:ext cx="4663440" cy="4206240"/>
+          </a:xfrm>
+          <a:prstGeom prst="rect">
+            <a:avLst/>
+          </a:prstGeom>
+          <a:noFill/>
+        </p:spPr>
+        <p:txBody>
+          <a:bodyPr wrap="square" lIns="0" tIns="0" rIns="0" bIns="0">
+            <a:spAutoFit/>
+          </a:bodyPr>
+          <a:lstStyle/>
+          <a:p>
+            <a:pPr>
+              <a:defRPr sz="1400" b="1">
+                <a:solidFill>
+                  <a:srgbClr val="F59E0B"/>
+                </a:solidFill>
+              </a:defRPr>
+            </a:pPr>
+            <a:r>
+              <a:t>Capstone Engineering Achievements</a:t>
+            </a:r>
+          </a:p>
+          <a:p>
+            <a:pPr>
+              <a:defRPr sz="1100">
+                <a:solidFill>
+                  <a:srgbClr val="94A3B8"/>
+                </a:solidFill>
+              </a:defRPr>
+            </a:pPr>
+            <a:r>
+              <a:t>• Engineered dual PyTorch neural networks combining classification and RUL regression.</a:t>
+            </a:r>
+          </a:p>
+          <a:p>
+            <a:pPr>
+              <a:defRPr sz="1100">
+                <a:solidFill>
+                  <a:srgbClr val="94A3B8"/>
+                </a:solidFill>
+              </a:defRPr>
+            </a:pPr>
+            <a:r>
+              <a:t>• Integrated 8-band FFT vibration kinematics for physical diagnostic attribution.</a:t>
+            </a:r>
+          </a:p>
+          <a:p>
+            <a:pPr>
+              <a:defRPr sz="1100">
+                <a:solidFill>
+                  <a:srgbClr val="94A3B8"/>
+                </a:solidFill>
+              </a:defRPr>
+            </a:pPr>
+            <a:r>
+              <a:t>• Delivered a modern, responsive single-page web dashboard on Port 5032.</a:t>
+            </a:r>
+          </a:p>
+          <a:p>
+            <a:pPr>
+              <a:defRPr sz="1100">
+                <a:solidFill>
+                  <a:srgbClr val="94A3B8"/>
+                </a:solidFill>
+              </a:defRPr>
+            </a:pPr>
+            <a:r>
+              <a:t>• Implemented high-performance SQLite WAL storage with complete audit logging.</a:t>
+            </a:r>
+          </a:p>
+          <a:p>
+            <a:pPr>
+              <a:defRPr sz="1100">
+                <a:solidFill>
+                  <a:srgbClr val="94A3B8"/>
+                </a:solidFill>
+              </a:defRPr>
+            </a:pPr>
+            <a:r>
+              <a:t>• Validated with 31 passing QA tests and 8 high-resolution live screenshots.</a:t>
+            </a:r>
+          </a:p>
+        </p:txBody>
+      </p:sp>
+      <p:sp>
+        <p:nvSpPr>
+          <p:cNvPr id="6" name="Rounded Rectangle 5"/>
+          <p:cNvSpPr/>
+          <p:nvPr/>
+        </p:nvSpPr>
+        <p:spPr>
+          <a:xfrm>
+            <a:off x="6217920" y="1645920"/>
+            <a:ext cx="5212080" cy="4572000"/>
+          </a:xfrm>
+          <a:prstGeom prst="roundRect">
+            <a:avLst/>
+          </a:prstGeom>
+          <a:solidFill>
+            <a:srgbClr val="0F1C30"/>
+          </a:solidFill>
+          <a:ln w="9525">
+            <a:solidFill>
+              <a:srgbClr val="FFFFFF"/>
+            </a:solidFill>
+          </a:ln>
+        </p:spPr>
+        <p:style>
+          <a:lnRef idx="1">
+            <a:schemeClr val="accent1"/>
+          </a:lnRef>
+          <a:fillRef idx="3">
+            <a:schemeClr val="accent1"/>
+          </a:fillRef>
+          <a:effectRef idx="2">
+            <a:schemeClr val="accent1"/>
+          </a:effectRef>
+          <a:fontRef idx="minor">
+            <a:schemeClr val="lt1"/>
+          </a:fontRef>
+        </p:style>
+        <p:txBody>
+          <a:bodyPr rtlCol="0" anchor="ctr"/>
+          <a:lstStyle/>
+          <a:p>
+            <a:pPr algn="ctr"/>
+          </a:p>
+        </p:txBody>
+      </p:sp>
+      <p:sp>
+        <p:nvSpPr>
+          <p:cNvPr id="7" name="TextBox 6"/>
+          <p:cNvSpPr txBox="1"/>
+          <p:nvPr/>
+        </p:nvSpPr>
+        <p:spPr>
+          <a:xfrm>
+            <a:off x="6446520" y="1828800"/>
+            <a:ext cx="4754880" cy="4206240"/>
+          </a:xfrm>
+          <a:prstGeom prst="rect">
+            <a:avLst/>
+          </a:prstGeom>
+          <a:noFill/>
+        </p:spPr>
+        <p:txBody>
+          <a:bodyPr wrap="square" lIns="0" tIns="0" rIns="0" bIns="0">
+            <a:spAutoFit/>
+          </a:bodyPr>
+          <a:lstStyle/>
+          <a:p>
+            <a:pPr>
+              <a:defRPr sz="1400" b="1">
+                <a:solidFill>
+                  <a:srgbClr val="F59E0B"/>
+                </a:solidFill>
+              </a:defRPr>
+            </a:pPr>
+            <a:r>
+              <a:t>Industry 4.0 Integration Roadmap</a:t>
+            </a:r>
+          </a:p>
+          <a:p>
+            <a:pPr>
+              <a:defRPr sz="1100">
+                <a:solidFill>
+                  <a:srgbClr val="94A3B8"/>
+                </a:solidFill>
+              </a:defRPr>
+            </a:pPr>
+            <a:r>
+              <a:t>• Direct MQTT / OPC-UA telemetry ingestion from plant SCADA PLC networks.</a:t>
+            </a:r>
+          </a:p>
+          <a:p>
+            <a:pPr>
+              <a:defRPr sz="1100">
+                <a:solidFill>
+                  <a:srgbClr val="94A3B8"/>
+                </a:solidFill>
+              </a:defRPr>
+            </a:pPr>
+            <a:r>
+              <a:t>• Edge deployment on industrial gateway hardware (Raspberry Pi CM4, Advantech).</a:t>
+            </a:r>
+          </a:p>
+          <a:p>
+            <a:pPr>
+              <a:defRPr sz="1100">
+                <a:solidFill>
+                  <a:srgbClr val="94A3B8"/>
+                </a:solidFill>
+              </a:defRPr>
+            </a:pPr>
+            <a:r>
+              <a:t>• Automated integration with SAP PM / IBM Maximo enterprise CMMS systems.</a:t>
+            </a:r>
+          </a:p>
+          <a:p>
+            <a:pPr>
+              <a:defRPr sz="1100">
+                <a:solidFill>
+                  <a:srgbClr val="94A3B8"/>
+                </a:solidFill>
+              </a:defRPr>
+            </a:pPr>
+            <a:r>
+              <a:t>• Federated fleet-wide transfer learning across multi-site industrial facilities.</a:t>
             </a:r>
           </a:p>
         </p:txBody>
@@ -3230,13 +5216,13 @@
         <p:spPr>
           <a:xfrm>
             <a:off x="0" y="0"/>
-            <a:ext cx="12191695" cy="1097280"/>
+            <a:ext cx="12191695" cy="6858000"/>
           </a:xfrm>
           <a:prstGeom prst="rect">
             <a:avLst/>
           </a:prstGeom>
           <a:solidFill>
-            <a:srgbClr val="0F172A"/>
+            <a:srgbClr val="070D18"/>
           </a:solidFill>
           <a:ln>
             <a:noFill/>
@@ -3272,8 +5258,8 @@
         </p:nvSpPr>
         <p:spPr>
           <a:xfrm>
-            <a:off x="731520" y="137160"/>
-            <a:ext cx="10698480" cy="822960"/>
+            <a:off x="731520" y="365760"/>
+            <a:ext cx="10698480" cy="1005840"/>
           </a:xfrm>
           <a:prstGeom prst="rect">
             <a:avLst/>
@@ -3281,46 +5267,91 @@
           <a:noFill/>
         </p:spPr>
         <p:txBody>
-          <a:bodyPr wrap="square">
+          <a:bodyPr wrap="square" lIns="0" tIns="0" rIns="0" bIns="0">
             <a:spAutoFit/>
           </a:bodyPr>
           <a:lstStyle/>
           <a:p>
             <a:pPr>
-              <a:defRPr sz="2400" b="1">
-                <a:solidFill>
-                  <a:srgbClr val="FFFFFF"/>
-                </a:solidFill>
-              </a:defRPr>
-            </a:pPr>
-            <a:r>
-              <a:t>1. Background &amp; Industrial Motivation</a:t>
-            </a:r>
-          </a:p>
-          <a:p>
-            <a:pPr>
-              <a:defRPr sz="1100">
-                <a:solidFill>
-                  <a:srgbClr val="94A3B8"/>
-                </a:solidFill>
-              </a:defRPr>
-            </a:pPr>
-            <a:r>
-              <a:t>Academic &amp; Industrial AI Project Series  |  Project 32 of 55</a:t>
-            </a:r>
-          </a:p>
-        </p:txBody>
-      </p:sp>
-      <p:sp>
-        <p:nvSpPr>
-          <p:cNvPr id="4" name="TextBox 3"/>
+              <a:defRPr sz="1000" b="1">
+                <a:solidFill>
+                  <a:srgbClr val="F59E0B"/>
+                </a:solidFill>
+              </a:defRPr>
+            </a:pPr>
+            <a:r>
+              <a:t>PROJECT 32 • INDUSTRIAL AI &amp; PREDICTIVE TELEMATICS</a:t>
+            </a:r>
+          </a:p>
+          <a:p>
+            <a:pPr>
+              <a:defRPr sz="2200" b="1">
+                <a:solidFill>
+                  <a:srgbClr val="F8FAFC"/>
+                </a:solidFill>
+              </a:defRPr>
+            </a:pPr>
+            <a:r>
+              <a:t>Executive Summary: Industrial Machine Reliability Challenges</a:t>
+            </a:r>
+          </a:p>
+        </p:txBody>
+      </p:sp>
+      <p:sp>
+        <p:nvSpPr>
+          <p:cNvPr id="4" name="Rounded Rectangle 3"/>
+          <p:cNvSpPr/>
+          <p:nvPr/>
+        </p:nvSpPr>
+        <p:spPr>
+          <a:xfrm>
+            <a:off x="731520" y="1645920"/>
+            <a:ext cx="5120640" cy="4572000"/>
+          </a:xfrm>
+          <a:prstGeom prst="roundRect">
+            <a:avLst/>
+          </a:prstGeom>
+          <a:solidFill>
+            <a:srgbClr val="0F1C30"/>
+          </a:solidFill>
+          <a:ln w="9525">
+            <a:solidFill>
+              <a:srgbClr val="FFFFFF"/>
+            </a:solidFill>
+          </a:ln>
+        </p:spPr>
+        <p:style>
+          <a:lnRef idx="1">
+            <a:schemeClr val="accent1"/>
+          </a:lnRef>
+          <a:fillRef idx="3">
+            <a:schemeClr val="accent1"/>
+          </a:fillRef>
+          <a:effectRef idx="2">
+            <a:schemeClr val="accent1"/>
+          </a:effectRef>
+          <a:fontRef idx="minor">
+            <a:schemeClr val="lt1"/>
+          </a:fontRef>
+        </p:style>
+        <p:txBody>
+          <a:bodyPr rtlCol="0" anchor="ctr"/>
+          <a:lstStyle/>
+          <a:p>
+            <a:pPr algn="ctr"/>
+          </a:p>
+        </p:txBody>
+      </p:sp>
+      <p:sp>
+        <p:nvSpPr>
+          <p:cNvPr id="5" name="TextBox 4"/>
           <p:cNvSpPr txBox="1"/>
           <p:nvPr/>
         </p:nvSpPr>
         <p:spPr>
           <a:xfrm>
-            <a:off x="731520" y="1371600"/>
-            <a:ext cx="10698480" cy="5029200"/>
+            <a:off x="960120" y="1828800"/>
+            <a:ext cx="4663440" cy="4206240"/>
           </a:xfrm>
           <a:prstGeom prst="rect">
             <a:avLst/>
@@ -3328,91 +5359,220 @@
           <a:noFill/>
         </p:spPr>
         <p:txBody>
-          <a:bodyPr wrap="square">
+          <a:bodyPr wrap="square" lIns="0" tIns="0" rIns="0" bIns="0">
             <a:spAutoFit/>
           </a:bodyPr>
           <a:lstStyle/>
           <a:p>
             <a:pPr>
-              <a:defRPr sz="1800" b="1">
-                <a:solidFill>
-                  <a:srgbClr val="1E3A8A"/>
-                </a:solidFill>
-              </a:defRPr>
-            </a:pPr>
-            <a:r>
-              <a:t>Executive Problem Background:</a:t>
-            </a:r>
-          </a:p>
-          <a:p>
-            <a:pPr>
-              <a:spcBef>
-                <a:spcPts val="1000"/>
-              </a:spcBef>
-              <a:defRPr sz="1400">
-                <a:solidFill>
-                  <a:srgbClr val="334155"/>
-                </a:solidFill>
-              </a:defRPr>
-            </a:pPr>
-            <a:r>
-              <a:t>"Predictive Maintenance of Industrial Machines Using Multivariate Sensor Data and Deep Learning is a comprehensive and crucial project aimed at addressing unexpected equipment failures, costly downtime, and inefficiencies in modern manufacturing and industrial environments. As industrial automation accelerates, facilities increasingly rely on interconnected machinery that continuously generates complex operational metrics, making them prime targets for sudden mechanical breakdowns if faults are ...</a:t>
-            </a:r>
-          </a:p>
-          <a:p>
-            <a:pPr>
-              <a:spcBef>
-                <a:spcPts val="1400"/>
-              </a:spcBef>
-              <a:defRPr sz="1600" b="1"/>
-            </a:pPr>
-            <a:r>
-              <a:t>Core Industry Drivers:</a:t>
-            </a:r>
-          </a:p>
-          <a:p>
-            <a:pPr>
-              <a:spcBef>
-                <a:spcPts val="400"/>
-              </a:spcBef>
-              <a:defRPr sz="1300">
-                <a:solidFill>
-                  <a:srgbClr val="475569"/>
-                </a:solidFill>
-              </a:defRPr>
-            </a:pPr>
-            <a:r>
-              <a:t>• Manual legacy inspection/decision methods incur high operational costs, delay, and human error.</a:t>
-            </a:r>
-          </a:p>
-          <a:p>
-            <a:pPr>
-              <a:spcBef>
-                <a:spcPts val="400"/>
-              </a:spcBef>
-              <a:defRPr sz="1300">
-                <a:solidFill>
-                  <a:srgbClr val="475569"/>
-                </a:solidFill>
-              </a:defRPr>
-            </a:pPr>
-            <a:r>
-              <a:t>• Scalable automated solutions require low-latency edge and cloud neural network inference.</a:t>
-            </a:r>
-          </a:p>
-          <a:p>
-            <a:pPr>
-              <a:spcBef>
-                <a:spcPts val="400"/>
-              </a:spcBef>
-              <a:defRPr sz="1300">
-                <a:solidFill>
-                  <a:srgbClr val="475569"/>
-                </a:solidFill>
-              </a:defRPr>
-            </a:pPr>
-            <a:r>
-              <a:t>• Explainable prediction confidence metrics are essential for operational trust and regulatory compliance.</a:t>
+              <a:defRPr sz="1400" b="1">
+                <a:solidFill>
+                  <a:srgbClr val="F59E0B"/>
+                </a:solidFill>
+              </a:defRPr>
+            </a:pPr>
+            <a:r>
+              <a:t>Cost of Unplanned Downtime</a:t>
+            </a:r>
+          </a:p>
+          <a:p>
+            <a:pPr>
+              <a:defRPr sz="1100">
+                <a:solidFill>
+                  <a:srgbClr val="94A3B8"/>
+                </a:solidFill>
+              </a:defRPr>
+            </a:pPr>
+            <a:r>
+              <a:t>• Unplanned industrial equipment failures cost manufacturing plants billions annually.</a:t>
+            </a:r>
+          </a:p>
+          <a:p>
+            <a:pPr>
+              <a:defRPr sz="1100">
+                <a:solidFill>
+                  <a:srgbClr val="94A3B8"/>
+                </a:solidFill>
+              </a:defRPr>
+            </a:pPr>
+            <a:r>
+              <a:t>• Traditional preventive maintenance adheres to rigid calendar schedules, leading to over-maintenance or missed incipient defects.</a:t>
+            </a:r>
+          </a:p>
+          <a:p>
+            <a:pPr>
+              <a:defRPr sz="1100">
+                <a:solidFill>
+                  <a:srgbClr val="94A3B8"/>
+                </a:solidFill>
+              </a:defRPr>
+            </a:pPr>
+            <a:r>
+              <a:t>• Vibration, thermal, and acoustic signals contain early micro-degradation signatures that simple threshold alarms miss.</a:t>
+            </a:r>
+          </a:p>
+          <a:p>
+            <a:pPr>
+              <a:defRPr sz="1100">
+                <a:solidFill>
+                  <a:srgbClr val="94A3B8"/>
+                </a:solidFill>
+              </a:defRPr>
+            </a:pPr>
+            <a:r>
+              <a:t>• Catastrophic bearing spalls or turbine imbalances cause catastrophic secondary asset destruction.</a:t>
+            </a:r>
+          </a:p>
+          <a:p>
+            <a:pPr>
+              <a:defRPr sz="1100">
+                <a:solidFill>
+                  <a:srgbClr val="94A3B8"/>
+                </a:solidFill>
+              </a:defRPr>
+            </a:pPr>
+            <a:r>
+              <a:t>• Manual vibration route data collection introduces multi-week diagnosis latency.</a:t>
+            </a:r>
+          </a:p>
+        </p:txBody>
+      </p:sp>
+      <p:sp>
+        <p:nvSpPr>
+          <p:cNvPr id="6" name="Rounded Rectangle 5"/>
+          <p:cNvSpPr/>
+          <p:nvPr/>
+        </p:nvSpPr>
+        <p:spPr>
+          <a:xfrm>
+            <a:off x="6217920" y="1645920"/>
+            <a:ext cx="5212080" cy="4572000"/>
+          </a:xfrm>
+          <a:prstGeom prst="roundRect">
+            <a:avLst/>
+          </a:prstGeom>
+          <a:solidFill>
+            <a:srgbClr val="0F1C30"/>
+          </a:solidFill>
+          <a:ln w="9525">
+            <a:solidFill>
+              <a:srgbClr val="FFFFFF"/>
+            </a:solidFill>
+          </a:ln>
+        </p:spPr>
+        <p:style>
+          <a:lnRef idx="1">
+            <a:schemeClr val="accent1"/>
+          </a:lnRef>
+          <a:fillRef idx="3">
+            <a:schemeClr val="accent1"/>
+          </a:fillRef>
+          <a:effectRef idx="2">
+            <a:schemeClr val="accent1"/>
+          </a:effectRef>
+          <a:fontRef idx="minor">
+            <a:schemeClr val="lt1"/>
+          </a:fontRef>
+        </p:style>
+        <p:txBody>
+          <a:bodyPr rtlCol="0" anchor="ctr"/>
+          <a:lstStyle/>
+          <a:p>
+            <a:pPr algn="ctr"/>
+          </a:p>
+        </p:txBody>
+      </p:sp>
+      <p:sp>
+        <p:nvSpPr>
+          <p:cNvPr id="7" name="TextBox 6"/>
+          <p:cNvSpPr txBox="1"/>
+          <p:nvPr/>
+        </p:nvSpPr>
+        <p:spPr>
+          <a:xfrm>
+            <a:off x="6446520" y="1828800"/>
+            <a:ext cx="4754880" cy="4206240"/>
+          </a:xfrm>
+          <a:prstGeom prst="rect">
+            <a:avLst/>
+          </a:prstGeom>
+          <a:noFill/>
+        </p:spPr>
+        <p:txBody>
+          <a:bodyPr wrap="square" lIns="0" tIns="0" rIns="0" bIns="0">
+            <a:spAutoFit/>
+          </a:bodyPr>
+          <a:lstStyle/>
+          <a:p>
+            <a:pPr>
+              <a:defRPr sz="1400" b="1">
+                <a:solidFill>
+                  <a:srgbClr val="F59E0B"/>
+                </a:solidFill>
+              </a:defRPr>
+            </a:pPr>
+            <a:r>
+              <a:t>The Project 32 Architecture</a:t>
+            </a:r>
+          </a:p>
+          <a:p>
+            <a:pPr>
+              <a:defRPr sz="1100">
+                <a:solidFill>
+                  <a:srgbClr val="94A3B8"/>
+                </a:solidFill>
+              </a:defRPr>
+            </a:pPr>
+            <a:r>
+              <a:t>• Continuous 8-dimensional telemetry ingestion across industrial rotating machinery.</a:t>
+            </a:r>
+          </a:p>
+          <a:p>
+            <a:pPr>
+              <a:defRPr sz="1100">
+                <a:solidFill>
+                  <a:srgbClr val="94A3B8"/>
+                </a:solidFill>
+              </a:defRPr>
+            </a:pPr>
+            <a:r>
+              <a:t>• 8-band FFT harmonic vibration spectrum analysis (1X, 2X, BPFO, BPFI, BSF, FTF).</a:t>
+            </a:r>
+          </a:p>
+          <a:p>
+            <a:pPr>
+              <a:defRPr sz="1100">
+                <a:solidFill>
+                  <a:srgbClr val="94A3B8"/>
+                </a:solidFill>
+              </a:defRPr>
+            </a:pPr>
+            <a:r>
+              <a:t>• Dual PyTorch neural networks: 6-class fault diagnostic classifier and continuous RUL regressor.</a:t>
+            </a:r>
+          </a:p>
+          <a:p>
+            <a:pPr>
+              <a:defRPr sz="1100">
+                <a:solidFill>
+                  <a:srgbClr val="94A3B8"/>
+                </a:solidFill>
+              </a:defRPr>
+            </a:pPr>
+            <a:r>
+              <a:t>• Sub-millisecond inference calculating Remaining Useful Life (RUL hours &amp; days) and health scores.</a:t>
+            </a:r>
+          </a:p>
+          <a:p>
+            <a:pPr>
+              <a:defRPr sz="1100">
+                <a:solidFill>
+                  <a:srgbClr val="94A3B8"/>
+                </a:solidFill>
+              </a:defRPr>
+            </a:pPr>
+            <a:r>
+              <a:t>• ACID relational SQLite storage with Write-Ahead Logging (WAL) and automated work order dispatch.</a:t>
             </a:r>
           </a:p>
         </p:txBody>
@@ -3444,13 +5604,13 @@
         <p:spPr>
           <a:xfrm>
             <a:off x="0" y="0"/>
-            <a:ext cx="12191695" cy="1097280"/>
+            <a:ext cx="12191695" cy="6858000"/>
           </a:xfrm>
           <a:prstGeom prst="rect">
             <a:avLst/>
           </a:prstGeom>
           <a:solidFill>
-            <a:srgbClr val="0F172A"/>
+            <a:srgbClr val="070D18"/>
           </a:solidFill>
           <a:ln>
             <a:noFill/>
@@ -3486,8 +5646,8 @@
         </p:nvSpPr>
         <p:spPr>
           <a:xfrm>
-            <a:off x="731520" y="137160"/>
-            <a:ext cx="10698480" cy="822960"/>
+            <a:off x="731520" y="365760"/>
+            <a:ext cx="10698480" cy="1005840"/>
           </a:xfrm>
           <a:prstGeom prst="rect">
             <a:avLst/>
@@ -3495,46 +5655,91 @@
           <a:noFill/>
         </p:spPr>
         <p:txBody>
-          <a:bodyPr wrap="square">
+          <a:bodyPr wrap="square" lIns="0" tIns="0" rIns="0" bIns="0">
             <a:spAutoFit/>
           </a:bodyPr>
           <a:lstStyle/>
           <a:p>
             <a:pPr>
-              <a:defRPr sz="2400" b="1">
-                <a:solidFill>
-                  <a:srgbClr val="FFFFFF"/>
-                </a:solidFill>
-              </a:defRPr>
-            </a:pPr>
-            <a:r>
-              <a:t>2. Problem Statement &amp; Key Objectives</a:t>
-            </a:r>
-          </a:p>
-          <a:p>
-            <a:pPr>
-              <a:defRPr sz="1100">
-                <a:solidFill>
-                  <a:srgbClr val="94A3B8"/>
-                </a:solidFill>
-              </a:defRPr>
-            </a:pPr>
-            <a:r>
-              <a:t>Academic &amp; Industrial AI Project Series  |  Project 32 of 55</a:t>
-            </a:r>
-          </a:p>
-        </p:txBody>
-      </p:sp>
-      <p:sp>
-        <p:nvSpPr>
-          <p:cNvPr id="4" name="TextBox 3"/>
+              <a:defRPr sz="1000" b="1">
+                <a:solidFill>
+                  <a:srgbClr val="F59E0B"/>
+                </a:solidFill>
+              </a:defRPr>
+            </a:pPr>
+            <a:r>
+              <a:t>PROJECT 32 • INDUSTRIAL AI &amp; PREDICTIVE TELEMATICS</a:t>
+            </a:r>
+          </a:p>
+          <a:p>
+            <a:pPr>
+              <a:defRPr sz="2200" b="1">
+                <a:solidFill>
+                  <a:srgbClr val="F8FAFC"/>
+                </a:solidFill>
+              </a:defRPr>
+            </a:pPr>
+            <a:r>
+              <a:t>Industrial Asset Fleet: 5 Mission-Critical Machines</a:t>
+            </a:r>
+          </a:p>
+        </p:txBody>
+      </p:sp>
+      <p:sp>
+        <p:nvSpPr>
+          <p:cNvPr id="4" name="Rounded Rectangle 3"/>
+          <p:cNvSpPr/>
+          <p:nvPr/>
+        </p:nvSpPr>
+        <p:spPr>
+          <a:xfrm>
+            <a:off x="731520" y="1645920"/>
+            <a:ext cx="3291840" cy="4572000"/>
+          </a:xfrm>
+          <a:prstGeom prst="roundRect">
+            <a:avLst/>
+          </a:prstGeom>
+          <a:solidFill>
+            <a:srgbClr val="0F1C30"/>
+          </a:solidFill>
+          <a:ln w="9525">
+            <a:solidFill>
+              <a:srgbClr val="FFFFFF"/>
+            </a:solidFill>
+          </a:ln>
+        </p:spPr>
+        <p:style>
+          <a:lnRef idx="1">
+            <a:schemeClr val="accent1"/>
+          </a:lnRef>
+          <a:fillRef idx="3">
+            <a:schemeClr val="accent1"/>
+          </a:fillRef>
+          <a:effectRef idx="2">
+            <a:schemeClr val="accent1"/>
+          </a:effectRef>
+          <a:fontRef idx="minor">
+            <a:schemeClr val="lt1"/>
+          </a:fontRef>
+        </p:style>
+        <p:txBody>
+          <a:bodyPr rtlCol="0" anchor="ctr"/>
+          <a:lstStyle/>
+          <a:p>
+            <a:pPr algn="ctr"/>
+          </a:p>
+        </p:txBody>
+      </p:sp>
+      <p:sp>
+        <p:nvSpPr>
+          <p:cNvPr id="5" name="TextBox 4"/>
           <p:cNvSpPr txBox="1"/>
           <p:nvPr/>
         </p:nvSpPr>
         <p:spPr>
           <a:xfrm>
-            <a:off x="731520" y="1371600"/>
-            <a:ext cx="10698480" cy="5029200"/>
+            <a:off x="960120" y="1828800"/>
+            <a:ext cx="2834640" cy="4206240"/>
           </a:xfrm>
           <a:prstGeom prst="rect">
             <a:avLst/>
@@ -3542,128 +5747,456 @@
           <a:noFill/>
         </p:spPr>
         <p:txBody>
-          <a:bodyPr wrap="square">
+          <a:bodyPr wrap="square" lIns="0" tIns="0" rIns="0" bIns="0">
             <a:spAutoFit/>
           </a:bodyPr>
           <a:lstStyle/>
           <a:p>
             <a:pPr>
-              <a:spcBef>
-                <a:spcPts val="800"/>
-              </a:spcBef>
-              <a:defRPr sz="1600" b="1">
-                <a:solidFill>
-                  <a:srgbClr val="10B981"/>
-                </a:solidFill>
-              </a:defRPr>
-            </a:pPr>
-            <a:r>
-              <a:t>✓ Predictive Accuracy &amp; Generalization</a:t>
-            </a:r>
-          </a:p>
-          <a:p>
-            <a:pPr>
-              <a:spcBef>
-                <a:spcPts val="200"/>
-              </a:spcBef>
-              <a:defRPr sz="1300">
-                <a:solidFill>
-                  <a:srgbClr val="475569"/>
-                </a:solidFill>
-              </a:defRPr>
-            </a:pPr>
-            <a:r>
-              <a:t>Achieve high validation precision across diverse real-world operating distributions.</a:t>
-            </a:r>
-          </a:p>
-          <a:p>
-            <a:pPr>
-              <a:spcBef>
-                <a:spcPts val="800"/>
-              </a:spcBef>
-              <a:defRPr sz="1600" b="1">
-                <a:solidFill>
-                  <a:srgbClr val="10B981"/>
-                </a:solidFill>
-              </a:defRPr>
-            </a:pPr>
-            <a:r>
-              <a:t>✓ Real-Time Low Latency Inference</a:t>
-            </a:r>
-          </a:p>
-          <a:p>
-            <a:pPr>
-              <a:spcBef>
-                <a:spcPts val="200"/>
-              </a:spcBef>
-              <a:defRPr sz="1300">
-                <a:solidFill>
-                  <a:srgbClr val="475569"/>
-                </a:solidFill>
-              </a:defRPr>
-            </a:pPr>
-            <a:r>
-              <a:t>Deliver end-to-end processing response times under 35 milliseconds per query.</a:t>
-            </a:r>
-          </a:p>
-          <a:p>
-            <a:pPr>
-              <a:spcBef>
-                <a:spcPts val="800"/>
-              </a:spcBef>
-              <a:defRPr sz="1600" b="1">
-                <a:solidFill>
-                  <a:srgbClr val="10B981"/>
-                </a:solidFill>
-              </a:defRPr>
-            </a:pPr>
-            <a:r>
-              <a:t>✓ Robust Anomaly &amp; Boundary Handling</a:t>
-            </a:r>
-          </a:p>
-          <a:p>
-            <a:pPr>
-              <a:spcBef>
-                <a:spcPts val="200"/>
-              </a:spcBef>
-              <a:defRPr sz="1300">
-                <a:solidFill>
-                  <a:srgbClr val="475569"/>
-                </a:solidFill>
-              </a:defRPr>
-            </a:pPr>
-            <a:r>
-              <a:t>Detect out-of-distribution instances and reject anomalous inputs with deterministic alerts.</a:t>
-            </a:r>
-          </a:p>
-          <a:p>
-            <a:pPr>
-              <a:spcBef>
-                <a:spcPts val="800"/>
-              </a:spcBef>
-              <a:defRPr sz="1600" b="1">
-                <a:solidFill>
-                  <a:srgbClr val="10B981"/>
-                </a:solidFill>
-              </a:defRPr>
-            </a:pPr>
-            <a:r>
-              <a:t>✓ Production-Ready Full Stack</a:t>
-            </a:r>
-          </a:p>
-          <a:p>
-            <a:pPr>
-              <a:spcBef>
-                <a:spcPts val="200"/>
-              </a:spcBef>
-              <a:defRPr sz="1300">
-                <a:solidFill>
-                  <a:srgbClr val="475569"/>
-                </a:solidFill>
-              </a:defRPr>
-            </a:pPr>
-            <a:r>
-              <a:t>Provide modular REST APIs, audit logging, and responsive user interfaces.</a:t>
+              <a:defRPr sz="1400" b="1">
+                <a:solidFill>
+                  <a:srgbClr val="F59E0B"/>
+                </a:solidFill>
+              </a:defRPr>
+            </a:pPr>
+            <a:r>
+              <a:t>Compressor &amp; Pump Assets</a:t>
+            </a:r>
+          </a:p>
+          <a:p>
+            <a:pPr>
+              <a:defRPr sz="1100">
+                <a:solidFill>
+                  <a:srgbClr val="94A3B8"/>
+                </a:solidFill>
+              </a:defRPr>
+            </a:pPr>
+            <a:r>
+              <a:t>• Rotary Screw Compressor A-101:</a:t>
+            </a:r>
+          </a:p>
+          <a:p>
+            <a:pPr>
+              <a:defRPr sz="1100">
+                <a:solidFill>
+                  <a:srgbClr val="94A3B8"/>
+                </a:solidFill>
+              </a:defRPr>
+            </a:pPr>
+            <a:r>
+              <a:t>•   - Criticality: High | 2,980 RPM.</a:t>
+            </a:r>
+          </a:p>
+          <a:p>
+            <a:pPr>
+              <a:defRPr sz="1100">
+                <a:solidFill>
+                  <a:srgbClr val="94A3B8"/>
+                </a:solidFill>
+              </a:defRPr>
+            </a:pPr>
+            <a:r>
+              <a:t>•   - Nominal: 72°C, 1.1 mm/s, 8.5 bar.</a:t>
+            </a:r>
+          </a:p>
+          <a:p>
+            <a:pPr>
+              <a:defRPr sz="1100">
+                <a:solidFill>
+                  <a:srgbClr val="94A3B8"/>
+                </a:solidFill>
+              </a:defRPr>
+            </a:pPr>
+            <a:r>
+              <a:t>•   - Susceptible to rotor imbalance and bearing wear.</a:t>
+            </a:r>
+          </a:p>
+          <a:p>
+            <a:pPr>
+              <a:defRPr sz="1100">
+                <a:solidFill>
+                  <a:srgbClr val="94A3B8"/>
+                </a:solidFill>
+              </a:defRPr>
+            </a:pPr>
+            <a:r>
+              <a:t>• Centrifugal Slurry Pump B-204:</a:t>
+            </a:r>
+          </a:p>
+          <a:p>
+            <a:pPr>
+              <a:defRPr sz="1100">
+                <a:solidFill>
+                  <a:srgbClr val="94A3B8"/>
+                </a:solidFill>
+              </a:defRPr>
+            </a:pPr>
+            <a:r>
+              <a:t>•   - Criticality: Critical | 1,480 RPM.</a:t>
+            </a:r>
+          </a:p>
+          <a:p>
+            <a:pPr>
+              <a:defRPr sz="1100">
+                <a:solidFill>
+                  <a:srgbClr val="94A3B8"/>
+                </a:solidFill>
+              </a:defRPr>
+            </a:pPr>
+            <a:r>
+              <a:t>•   - Nominal: 64°C, 0.8 mm/s, 14.2 bar.</a:t>
+            </a:r>
+          </a:p>
+          <a:p>
+            <a:pPr>
+              <a:defRPr sz="1100">
+                <a:solidFill>
+                  <a:srgbClr val="94A3B8"/>
+                </a:solidFill>
+              </a:defRPr>
+            </a:pPr>
+            <a:r>
+              <a:t>•   - Exposed to hydraulic cavitation and impeller erosion.</a:t>
+            </a:r>
+          </a:p>
+        </p:txBody>
+      </p:sp>
+      <p:sp>
+        <p:nvSpPr>
+          <p:cNvPr id="6" name="Rounded Rectangle 5"/>
+          <p:cNvSpPr/>
+          <p:nvPr/>
+        </p:nvSpPr>
+        <p:spPr>
+          <a:xfrm>
+            <a:off x="4389120" y="1645920"/>
+            <a:ext cx="3291840" cy="4572000"/>
+          </a:xfrm>
+          <a:prstGeom prst="roundRect">
+            <a:avLst/>
+          </a:prstGeom>
+          <a:solidFill>
+            <a:srgbClr val="0F1C30"/>
+          </a:solidFill>
+          <a:ln w="9525">
+            <a:solidFill>
+              <a:srgbClr val="FFFFFF"/>
+            </a:solidFill>
+          </a:ln>
+        </p:spPr>
+        <p:style>
+          <a:lnRef idx="1">
+            <a:schemeClr val="accent1"/>
+          </a:lnRef>
+          <a:fillRef idx="3">
+            <a:schemeClr val="accent1"/>
+          </a:fillRef>
+          <a:effectRef idx="2">
+            <a:schemeClr val="accent1"/>
+          </a:effectRef>
+          <a:fontRef idx="minor">
+            <a:schemeClr val="lt1"/>
+          </a:fontRef>
+        </p:style>
+        <p:txBody>
+          <a:bodyPr rtlCol="0" anchor="ctr"/>
+          <a:lstStyle/>
+          <a:p>
+            <a:pPr algn="ctr"/>
+          </a:p>
+        </p:txBody>
+      </p:sp>
+      <p:sp>
+        <p:nvSpPr>
+          <p:cNvPr id="7" name="TextBox 6"/>
+          <p:cNvSpPr txBox="1"/>
+          <p:nvPr/>
+        </p:nvSpPr>
+        <p:spPr>
+          <a:xfrm>
+            <a:off x="4617720" y="1828800"/>
+            <a:ext cx="2834640" cy="4206240"/>
+          </a:xfrm>
+          <a:prstGeom prst="rect">
+            <a:avLst/>
+          </a:prstGeom>
+          <a:noFill/>
+        </p:spPr>
+        <p:txBody>
+          <a:bodyPr wrap="square" lIns="0" tIns="0" rIns="0" bIns="0">
+            <a:spAutoFit/>
+          </a:bodyPr>
+          <a:lstStyle/>
+          <a:p>
+            <a:pPr>
+              <a:defRPr sz="1400" b="1">
+                <a:solidFill>
+                  <a:srgbClr val="F59E0B"/>
+                </a:solidFill>
+              </a:defRPr>
+            </a:pPr>
+            <a:r>
+              <a:t>Motor &amp; Turbine Assets</a:t>
+            </a:r>
+          </a:p>
+          <a:p>
+            <a:pPr>
+              <a:defRPr sz="1100">
+                <a:solidFill>
+                  <a:srgbClr val="94A3B8"/>
+                </a:solidFill>
+              </a:defRPr>
+            </a:pPr>
+            <a:r>
+              <a:t>• Induction Motor C-302:</a:t>
+            </a:r>
+          </a:p>
+          <a:p>
+            <a:pPr>
+              <a:defRPr sz="1100">
+                <a:solidFill>
+                  <a:srgbClr val="94A3B8"/>
+                </a:solidFill>
+              </a:defRPr>
+            </a:pPr>
+            <a:r>
+              <a:t>•   - Criticality: Medium | 1,780 RPM.</a:t>
+            </a:r>
+          </a:p>
+          <a:p>
+            <a:pPr>
+              <a:defRPr sz="1100">
+                <a:solidFill>
+                  <a:srgbClr val="94A3B8"/>
+                </a:solidFill>
+              </a:defRPr>
+            </a:pPr>
+            <a:r>
+              <a:t>•   - Nominal: 68°C, 0.6 mm/s, 1.0 bar.</a:t>
+            </a:r>
+          </a:p>
+          <a:p>
+            <a:pPr>
+              <a:defRPr sz="1100">
+                <a:solidFill>
+                  <a:srgbClr val="94A3B8"/>
+                </a:solidFill>
+              </a:defRPr>
+            </a:pPr>
+            <a:r>
+              <a:t>•   - Monitored for stator winding overheating.</a:t>
+            </a:r>
+          </a:p>
+          <a:p>
+            <a:pPr>
+              <a:defRPr sz="1100">
+                <a:solidFill>
+                  <a:srgbClr val="94A3B8"/>
+                </a:solidFill>
+              </a:defRPr>
+            </a:pPr>
+            <a:r>
+              <a:t>• Co-Gen Gas Turbine D-401:</a:t>
+            </a:r>
+          </a:p>
+          <a:p>
+            <a:pPr>
+              <a:defRPr sz="1100">
+                <a:solidFill>
+                  <a:srgbClr val="94A3B8"/>
+                </a:solidFill>
+              </a:defRPr>
+            </a:pPr>
+            <a:r>
+              <a:t>•   - Criticality: Critical | 5,400 RPM.</a:t>
+            </a:r>
+          </a:p>
+          <a:p>
+            <a:pPr>
+              <a:defRPr sz="1100">
+                <a:solidFill>
+                  <a:srgbClr val="94A3B8"/>
+                </a:solidFill>
+              </a:defRPr>
+            </a:pPr>
+            <a:r>
+              <a:t>•   - Nominal: 118°C, 1.4 mm/s, 22.0 bar.</a:t>
+            </a:r>
+          </a:p>
+          <a:p>
+            <a:pPr>
+              <a:defRPr sz="1100">
+                <a:solidFill>
+                  <a:srgbClr val="94A3B8"/>
+                </a:solidFill>
+              </a:defRPr>
+            </a:pPr>
+            <a:r>
+              <a:t>•   - Highest thermal &amp; mechanical stress profile.</a:t>
+            </a:r>
+          </a:p>
+        </p:txBody>
+      </p:sp>
+      <p:sp>
+        <p:nvSpPr>
+          <p:cNvPr id="8" name="Rounded Rectangle 7"/>
+          <p:cNvSpPr/>
+          <p:nvPr/>
+        </p:nvSpPr>
+        <p:spPr>
+          <a:xfrm>
+            <a:off x="8046720" y="1645920"/>
+            <a:ext cx="3383280" cy="4572000"/>
+          </a:xfrm>
+          <a:prstGeom prst="roundRect">
+            <a:avLst/>
+          </a:prstGeom>
+          <a:solidFill>
+            <a:srgbClr val="0F1C30"/>
+          </a:solidFill>
+          <a:ln w="9525">
+            <a:solidFill>
+              <a:srgbClr val="FFFFFF"/>
+            </a:solidFill>
+          </a:ln>
+        </p:spPr>
+        <p:style>
+          <a:lnRef idx="1">
+            <a:schemeClr val="accent1"/>
+          </a:lnRef>
+          <a:fillRef idx="3">
+            <a:schemeClr val="accent1"/>
+          </a:fillRef>
+          <a:effectRef idx="2">
+            <a:schemeClr val="accent1"/>
+          </a:effectRef>
+          <a:fontRef idx="minor">
+            <a:schemeClr val="lt1"/>
+          </a:fontRef>
+        </p:style>
+        <p:txBody>
+          <a:bodyPr rtlCol="0" anchor="ctr"/>
+          <a:lstStyle/>
+          <a:p>
+            <a:pPr algn="ctr"/>
+          </a:p>
+        </p:txBody>
+      </p:sp>
+      <p:sp>
+        <p:nvSpPr>
+          <p:cNvPr id="9" name="TextBox 8"/>
+          <p:cNvSpPr txBox="1"/>
+          <p:nvPr/>
+        </p:nvSpPr>
+        <p:spPr>
+          <a:xfrm>
+            <a:off x="8275320" y="1828800"/>
+            <a:ext cx="2926080" cy="4206240"/>
+          </a:xfrm>
+          <a:prstGeom prst="rect">
+            <a:avLst/>
+          </a:prstGeom>
+          <a:noFill/>
+        </p:spPr>
+        <p:txBody>
+          <a:bodyPr wrap="square" lIns="0" tIns="0" rIns="0" bIns="0">
+            <a:spAutoFit/>
+          </a:bodyPr>
+          <a:lstStyle/>
+          <a:p>
+            <a:pPr>
+              <a:defRPr sz="1400" b="1">
+                <a:solidFill>
+                  <a:srgbClr val="F59E0B"/>
+                </a:solidFill>
+              </a:defRPr>
+            </a:pPr>
+            <a:r>
+              <a:t>Material Handling Asset</a:t>
+            </a:r>
+          </a:p>
+          <a:p>
+            <a:pPr>
+              <a:defRPr sz="1100">
+                <a:solidFill>
+                  <a:srgbClr val="94A3B8"/>
+                </a:solidFill>
+              </a:defRPr>
+            </a:pPr>
+            <a:r>
+              <a:t>• Heavy Ore Conveyor Drive E-505:</a:t>
+            </a:r>
+          </a:p>
+          <a:p>
+            <a:pPr>
+              <a:defRPr sz="1100">
+                <a:solidFill>
+                  <a:srgbClr val="94A3B8"/>
+                </a:solidFill>
+              </a:defRPr>
+            </a:pPr>
+            <a:r>
+              <a:t>•   - Criticality: Low | 720 RPM.</a:t>
+            </a:r>
+          </a:p>
+          <a:p>
+            <a:pPr>
+              <a:defRPr sz="1100">
+                <a:solidFill>
+                  <a:srgbClr val="94A3B8"/>
+                </a:solidFill>
+              </a:defRPr>
+            </a:pPr>
+            <a:r>
+              <a:t>•   - Nominal: 52°C, 1.8 mm/s, 3.5 bar.</a:t>
+            </a:r>
+          </a:p>
+          <a:p>
+            <a:pPr>
+              <a:defRPr sz="1100">
+                <a:solidFill>
+                  <a:srgbClr val="94A3B8"/>
+                </a:solidFill>
+              </a:defRPr>
+            </a:pPr>
+            <a:r>
+              <a:t>•   - High mechanical coupling looseness risk.</a:t>
+            </a:r>
+          </a:p>
+          <a:p>
+            <a:pPr>
+              <a:defRPr sz="1100">
+                <a:solidFill>
+                  <a:srgbClr val="94A3B8"/>
+                </a:solidFill>
+              </a:defRPr>
+            </a:pPr>
+            <a:r>
+              <a:t>• Dynamic Health Profiling:</a:t>
+            </a:r>
+          </a:p>
+          <a:p>
+            <a:pPr>
+              <a:defRPr sz="1100">
+                <a:solidFill>
+                  <a:srgbClr val="94A3B8"/>
+                </a:solidFill>
+              </a:defRPr>
+            </a:pPr>
+            <a:r>
+              <a:t>•   - System maintains baseline nominal thresholds.</a:t>
+            </a:r>
+          </a:p>
+          <a:p>
+            <a:pPr>
+              <a:defRPr sz="1100">
+                <a:solidFill>
+                  <a:srgbClr val="94A3B8"/>
+                </a:solidFill>
+              </a:defRPr>
+            </a:pPr>
+            <a:r>
+              <a:t>•   - Normalized deviations trigger predictive diagnosis.</a:t>
             </a:r>
           </a:p>
         </p:txBody>
@@ -3695,13 +6228,13 @@
         <p:spPr>
           <a:xfrm>
             <a:off x="0" y="0"/>
-            <a:ext cx="12191695" cy="1097280"/>
+            <a:ext cx="12191695" cy="6858000"/>
           </a:xfrm>
           <a:prstGeom prst="rect">
             <a:avLst/>
           </a:prstGeom>
           <a:solidFill>
-            <a:srgbClr val="0F172A"/>
+            <a:srgbClr val="070D18"/>
           </a:solidFill>
           <a:ln>
             <a:noFill/>
@@ -3737,8 +6270,8 @@
         </p:nvSpPr>
         <p:spPr>
           <a:xfrm>
-            <a:off x="731520" y="137160"/>
-            <a:ext cx="10698480" cy="822960"/>
+            <a:off x="731520" y="365760"/>
+            <a:ext cx="10698480" cy="1005840"/>
           </a:xfrm>
           <a:prstGeom prst="rect">
             <a:avLst/>
@@ -3746,46 +6279,91 @@
           <a:noFill/>
         </p:spPr>
         <p:txBody>
-          <a:bodyPr wrap="square">
+          <a:bodyPr wrap="square" lIns="0" tIns="0" rIns="0" bIns="0">
             <a:spAutoFit/>
           </a:bodyPr>
           <a:lstStyle/>
           <a:p>
             <a:pPr>
-              <a:defRPr sz="2400" b="1">
-                <a:solidFill>
-                  <a:srgbClr val="FFFFFF"/>
-                </a:solidFill>
-              </a:defRPr>
-            </a:pPr>
-            <a:r>
-              <a:t>3. System Architecture &amp; Workflow Pipeline</a:t>
-            </a:r>
-          </a:p>
-          <a:p>
-            <a:pPr>
-              <a:defRPr sz="1100">
-                <a:solidFill>
-                  <a:srgbClr val="94A3B8"/>
-                </a:solidFill>
-              </a:defRPr>
-            </a:pPr>
-            <a:r>
-              <a:t>Academic &amp; Industrial AI Project Series  |  Project 32 of 55</a:t>
-            </a:r>
-          </a:p>
-        </p:txBody>
-      </p:sp>
-      <p:sp>
-        <p:nvSpPr>
-          <p:cNvPr id="4" name="TextBox 3"/>
+              <a:defRPr sz="1000" b="1">
+                <a:solidFill>
+                  <a:srgbClr val="F59E0B"/>
+                </a:solidFill>
+              </a:defRPr>
+            </a:pPr>
+            <a:r>
+              <a:t>PROJECT 32 • INDUSTRIAL AI &amp; PREDICTIVE TELEMATICS</a:t>
+            </a:r>
+          </a:p>
+          <a:p>
+            <a:pPr>
+              <a:defRPr sz="2200" b="1">
+                <a:solidFill>
+                  <a:srgbClr val="F8FAFC"/>
+                </a:solidFill>
+              </a:defRPr>
+            </a:pPr>
+            <a:r>
+              <a:t>Multivariate Telemetry Dataset (6,000 Industrial Records)</a:t>
+            </a:r>
+          </a:p>
+        </p:txBody>
+      </p:sp>
+      <p:sp>
+        <p:nvSpPr>
+          <p:cNvPr id="4" name="Rounded Rectangle 3"/>
+          <p:cNvSpPr/>
+          <p:nvPr/>
+        </p:nvSpPr>
+        <p:spPr>
+          <a:xfrm>
+            <a:off x="731520" y="1645920"/>
+            <a:ext cx="5120640" cy="4572000"/>
+          </a:xfrm>
+          <a:prstGeom prst="roundRect">
+            <a:avLst/>
+          </a:prstGeom>
+          <a:solidFill>
+            <a:srgbClr val="0F1C30"/>
+          </a:solidFill>
+          <a:ln w="9525">
+            <a:solidFill>
+              <a:srgbClr val="FFFFFF"/>
+            </a:solidFill>
+          </a:ln>
+        </p:spPr>
+        <p:style>
+          <a:lnRef idx="1">
+            <a:schemeClr val="accent1"/>
+          </a:lnRef>
+          <a:fillRef idx="3">
+            <a:schemeClr val="accent1"/>
+          </a:fillRef>
+          <a:effectRef idx="2">
+            <a:schemeClr val="accent1"/>
+          </a:effectRef>
+          <a:fontRef idx="minor">
+            <a:schemeClr val="lt1"/>
+          </a:fontRef>
+        </p:style>
+        <p:txBody>
+          <a:bodyPr rtlCol="0" anchor="ctr"/>
+          <a:lstStyle/>
+          <a:p>
+            <a:pPr algn="ctr"/>
+          </a:p>
+        </p:txBody>
+      </p:sp>
+      <p:sp>
+        <p:nvSpPr>
+          <p:cNvPr id="5" name="TextBox 4"/>
           <p:cNvSpPr txBox="1"/>
           <p:nvPr/>
         </p:nvSpPr>
         <p:spPr>
           <a:xfrm>
-            <a:off x="731520" y="1371600"/>
-            <a:ext cx="10698480" cy="5029200"/>
+            <a:off x="960120" y="1828800"/>
+            <a:ext cx="4663440" cy="4206240"/>
           </a:xfrm>
           <a:prstGeom prst="rect">
             <a:avLst/>
@@ -3793,143 +6371,280 @@
           <a:noFill/>
         </p:spPr>
         <p:txBody>
-          <a:bodyPr wrap="square">
+          <a:bodyPr wrap="square" lIns="0" tIns="0" rIns="0" bIns="0">
             <a:spAutoFit/>
           </a:bodyPr>
           <a:lstStyle/>
           <a:p>
             <a:pPr>
-              <a:spcBef>
-                <a:spcPts val="800"/>
-              </a:spcBef>
-              <a:defRPr sz="1500" b="1">
-                <a:solidFill>
-                  <a:srgbClr val="2563EB"/>
-                </a:solidFill>
-              </a:defRPr>
-            </a:pPr>
-            <a:r>
-              <a:t>[1] Ingestion Layer</a:t>
-            </a:r>
-          </a:p>
-          <a:p>
-            <a:pPr>
-              <a:defRPr sz="1300">
-                <a:solidFill>
-                  <a:srgbClr val="475569"/>
-                </a:solidFill>
-              </a:defRPr>
-            </a:pPr>
-            <a:r>
-              <a:t>Raw telemetry, video feeds, or structured tabular features ingested via secure endpoints.</a:t>
-            </a:r>
-          </a:p>
-          <a:p>
-            <a:pPr>
-              <a:spcBef>
-                <a:spcPts val="800"/>
-              </a:spcBef>
-              <a:defRPr sz="1500" b="1">
-                <a:solidFill>
-                  <a:srgbClr val="2563EB"/>
-                </a:solidFill>
-              </a:defRPr>
-            </a:pPr>
-            <a:r>
-              <a:t>[2] Preprocessing &amp; Normalization</a:t>
-            </a:r>
-          </a:p>
-          <a:p>
-            <a:pPr>
-              <a:defRPr sz="1300">
-                <a:solidFill>
-                  <a:srgbClr val="475569"/>
-                </a:solidFill>
-              </a:defRPr>
-            </a:pPr>
-            <a:r>
-              <a:t>Feature scaling, missing value imputation, winsorization, and tensor reshaping.</a:t>
-            </a:r>
-          </a:p>
-          <a:p>
-            <a:pPr>
-              <a:spcBef>
-                <a:spcPts val="800"/>
-              </a:spcBef>
-              <a:defRPr sz="1500" b="1">
-                <a:solidFill>
-                  <a:srgbClr val="2563EB"/>
-                </a:solidFill>
-              </a:defRPr>
-            </a:pPr>
-            <a:r>
-              <a:t>[3] Deep Neural Inference Engine</a:t>
-            </a:r>
-          </a:p>
-          <a:p>
-            <a:pPr>
-              <a:defRPr sz="1300">
-                <a:solidFill>
-                  <a:srgbClr val="475569"/>
-                </a:solidFill>
-              </a:defRPr>
-            </a:pPr>
-            <a:r>
-              <a:t>Optimized model evaluating representations with GPU/MPS/CPU acceleration.</a:t>
-            </a:r>
-          </a:p>
-          <a:p>
-            <a:pPr>
-              <a:spcBef>
-                <a:spcPts val="800"/>
-              </a:spcBef>
-              <a:defRPr sz="1500" b="1">
-                <a:solidFill>
-                  <a:srgbClr val="2563EB"/>
-                </a:solidFill>
-              </a:defRPr>
-            </a:pPr>
-            <a:r>
-              <a:t>[4] Post-Processing &amp; Decision Support</a:t>
-            </a:r>
-          </a:p>
-          <a:p>
-            <a:pPr>
-              <a:defRPr sz="1300">
-                <a:solidFill>
-                  <a:srgbClr val="475569"/>
-                </a:solidFill>
-              </a:defRPr>
-            </a:pPr>
-            <a:r>
-              <a:t>Threshold calibration, confidence scoring, classification/regression output formatting.</a:t>
-            </a:r>
-          </a:p>
-          <a:p>
-            <a:pPr>
-              <a:spcBef>
-                <a:spcPts val="800"/>
-              </a:spcBef>
-              <a:defRPr sz="1500" b="1">
-                <a:solidFill>
-                  <a:srgbClr val="2563EB"/>
-                </a:solidFill>
-              </a:defRPr>
-            </a:pPr>
-            <a:r>
-              <a:t>[5] Visualization &amp; Persistence</a:t>
-            </a:r>
-          </a:p>
-          <a:p>
-            <a:pPr>
-              <a:defRPr sz="1300">
-                <a:solidFill>
-                  <a:srgbClr val="475569"/>
-                </a:solidFill>
-              </a:defRPr>
-            </a:pPr>
-            <a:r>
-              <a:t>Interactive UI dashboard rendering metrics and SQLite/PostgreSQL audit logging.</a:t>
+              <a:defRPr sz="1400" b="1">
+                <a:solidFill>
+                  <a:srgbClr val="F59E0B"/>
+                </a:solidFill>
+              </a:defRPr>
+            </a:pPr>
+            <a:r>
+              <a:t>8 Physical Sensor Feature Dimensions</a:t>
+            </a:r>
+          </a:p>
+          <a:p>
+            <a:pPr>
+              <a:defRPr sz="1100">
+                <a:solidFill>
+                  <a:srgbClr val="94A3B8"/>
+                </a:solidFill>
+              </a:defRPr>
+            </a:pPr>
+            <a:r>
+              <a:t>• Temperature (°C): 35.0 to 140.0 °C continuous thermal sensor.</a:t>
+            </a:r>
+          </a:p>
+          <a:p>
+            <a:pPr>
+              <a:defRPr sz="1100">
+                <a:solidFill>
+                  <a:srgbClr val="94A3B8"/>
+                </a:solidFill>
+              </a:defRPr>
+            </a:pPr>
+            <a:r>
+              <a:t>• Vibration RMS (mm/s): 0.4 to 8.5 mm/s piezoelectric accelerometer.</a:t>
+            </a:r>
+          </a:p>
+          <a:p>
+            <a:pPr>
+              <a:defRPr sz="1100">
+                <a:solidFill>
+                  <a:srgbClr val="94A3B8"/>
+                </a:solidFill>
+              </a:defRPr>
+            </a:pPr>
+            <a:r>
+              <a:t>• Discharge Pressure (bar): 0.5 to 28.0 bar piezoresistive transducer.</a:t>
+            </a:r>
+          </a:p>
+          <a:p>
+            <a:pPr>
+              <a:defRPr sz="1100">
+                <a:solidFill>
+                  <a:srgbClr val="94A3B8"/>
+                </a:solidFill>
+              </a:defRPr>
+            </a:pPr>
+            <a:r>
+              <a:t>• Shaft Rotation (RPM): 600 to 5,800 RPM optical encoder.</a:t>
+            </a:r>
+          </a:p>
+          <a:p>
+            <a:pPr>
+              <a:defRPr sz="1100">
+                <a:solidFill>
+                  <a:srgbClr val="94A3B8"/>
+                </a:solidFill>
+              </a:defRPr>
+            </a:pPr>
+            <a:r>
+              <a:t>• Oil Viscosity (cSt): 25.0 to 80.0 cSt dielectric lubrication sensor.</a:t>
+            </a:r>
+          </a:p>
+          <a:p>
+            <a:pPr>
+              <a:defRPr sz="1100">
+                <a:solidFill>
+                  <a:srgbClr val="94A3B8"/>
+                </a:solidFill>
+              </a:defRPr>
+            </a:pPr>
+            <a:r>
+              <a:t>• Acoustic Emission (dB): 45.0 to 110.0 dB ultrasonic high-frequency probe.</a:t>
+            </a:r>
+          </a:p>
+          <a:p>
+            <a:pPr>
+              <a:defRPr sz="1100">
+                <a:solidFill>
+                  <a:srgbClr val="94A3B8"/>
+                </a:solidFill>
+              </a:defRPr>
+            </a:pPr>
+            <a:r>
+              <a:t>• FFT Harmonic Ratio: 2X to 1X harmonic ratio (0.05 to 1.6).</a:t>
+            </a:r>
+          </a:p>
+          <a:p>
+            <a:pPr>
+              <a:defRPr sz="1100">
+                <a:solidFill>
+                  <a:srgbClr val="94A3B8"/>
+                </a:solidFill>
+              </a:defRPr>
+            </a:pPr>
+            <a:r>
+              <a:t>• Bearing Defect Frequency Energy: BPFO/BPFI spectral energy (0.01 to 1.5).</a:t>
+            </a:r>
+          </a:p>
+        </p:txBody>
+      </p:sp>
+      <p:sp>
+        <p:nvSpPr>
+          <p:cNvPr id="6" name="Rounded Rectangle 5"/>
+          <p:cNvSpPr/>
+          <p:nvPr/>
+        </p:nvSpPr>
+        <p:spPr>
+          <a:xfrm>
+            <a:off x="6217920" y="1645920"/>
+            <a:ext cx="5212080" cy="4572000"/>
+          </a:xfrm>
+          <a:prstGeom prst="roundRect">
+            <a:avLst/>
+          </a:prstGeom>
+          <a:solidFill>
+            <a:srgbClr val="0F1C30"/>
+          </a:solidFill>
+          <a:ln w="9525">
+            <a:solidFill>
+              <a:srgbClr val="FFFFFF"/>
+            </a:solidFill>
+          </a:ln>
+        </p:spPr>
+        <p:style>
+          <a:lnRef idx="1">
+            <a:schemeClr val="accent1"/>
+          </a:lnRef>
+          <a:fillRef idx="3">
+            <a:schemeClr val="accent1"/>
+          </a:fillRef>
+          <a:effectRef idx="2">
+            <a:schemeClr val="accent1"/>
+          </a:effectRef>
+          <a:fontRef idx="minor">
+            <a:schemeClr val="lt1"/>
+          </a:fontRef>
+        </p:style>
+        <p:txBody>
+          <a:bodyPr rtlCol="0" anchor="ctr"/>
+          <a:lstStyle/>
+          <a:p>
+            <a:pPr algn="ctr"/>
+          </a:p>
+        </p:txBody>
+      </p:sp>
+      <p:sp>
+        <p:nvSpPr>
+          <p:cNvPr id="7" name="TextBox 6"/>
+          <p:cNvSpPr txBox="1"/>
+          <p:nvPr/>
+        </p:nvSpPr>
+        <p:spPr>
+          <a:xfrm>
+            <a:off x="6446520" y="1828800"/>
+            <a:ext cx="4754880" cy="4206240"/>
+          </a:xfrm>
+          <a:prstGeom prst="rect">
+            <a:avLst/>
+          </a:prstGeom>
+          <a:noFill/>
+        </p:spPr>
+        <p:txBody>
+          <a:bodyPr wrap="square" lIns="0" tIns="0" rIns="0" bIns="0">
+            <a:spAutoFit/>
+          </a:bodyPr>
+          <a:lstStyle/>
+          <a:p>
+            <a:pPr>
+              <a:defRPr sz="1400" b="1">
+                <a:solidFill>
+                  <a:srgbClr val="F59E0B"/>
+                </a:solidFill>
+              </a:defRPr>
+            </a:pPr>
+            <a:r>
+              <a:t>6 Model Fault Modes</a:t>
+            </a:r>
+          </a:p>
+          <a:p>
+            <a:pPr>
+              <a:defRPr sz="1100">
+                <a:solidFill>
+                  <a:srgbClr val="94A3B8"/>
+                </a:solidFill>
+              </a:defRPr>
+            </a:pPr>
+            <a:r>
+              <a:t>• Normal Baseline (35%): Equilibrium operating envelope.</a:t>
+            </a:r>
+          </a:p>
+          <a:p>
+            <a:pPr>
+              <a:defRPr sz="1100">
+                <a:solidFill>
+                  <a:srgbClr val="94A3B8"/>
+                </a:solidFill>
+              </a:defRPr>
+            </a:pPr>
+            <a:r>
+              <a:t>• Outer Race Bearing Spall (15%): High BPFO defect energy &amp; vibration.</a:t>
+            </a:r>
+          </a:p>
+          <a:p>
+            <a:pPr>
+              <a:defRPr sz="1100">
+                <a:solidFill>
+                  <a:srgbClr val="94A3B8"/>
+                </a:solidFill>
+              </a:defRPr>
+            </a:pPr>
+            <a:r>
+              <a:t>• Rotor Dynamic Imbalance (14%): High 1X/2X fundamental harmonics.</a:t>
+            </a:r>
+          </a:p>
+          <a:p>
+            <a:pPr>
+              <a:defRPr sz="1100">
+                <a:solidFill>
+                  <a:srgbClr val="94A3B8"/>
+                </a:solidFill>
+              </a:defRPr>
+            </a:pPr>
+            <a:r>
+              <a:t>• Hydraulic Cavitation Wear (12%): High acoustic emission &amp; pressure drop.</a:t>
+            </a:r>
+          </a:p>
+          <a:p>
+            <a:pPr>
+              <a:defRPr sz="1100">
+                <a:solidFill>
+                  <a:srgbClr val="94A3B8"/>
+                </a:solidFill>
+              </a:defRPr>
+            </a:pPr>
+            <a:r>
+              <a:t>• Stator Winding Overheating (12%): Severe thermal surge (&gt;1.5x nominal).</a:t>
+            </a:r>
+          </a:p>
+          <a:p>
+            <a:pPr>
+              <a:defRPr sz="1100">
+                <a:solidFill>
+                  <a:srgbClr val="94A3B8"/>
+                </a:solidFill>
+              </a:defRPr>
+            </a:pPr>
+            <a:r>
+              <a:t>• Mechanical Coupling Looseness (12%): Elevated 2X/3X harmonics.</a:t>
+            </a:r>
+          </a:p>
+          <a:p>
+            <a:pPr>
+              <a:defRPr sz="1100">
+                <a:solidFill>
+                  <a:srgbClr val="94A3B8"/>
+                </a:solidFill>
+              </a:defRPr>
+            </a:pPr>
+            <a:r>
+              <a:t>• Dataset serialized to 6,000-record CSV and structured JSON.</a:t>
             </a:r>
           </a:p>
         </p:txBody>
@@ -3961,13 +6676,13 @@
         <p:spPr>
           <a:xfrm>
             <a:off x="0" y="0"/>
-            <a:ext cx="12191695" cy="1097280"/>
+            <a:ext cx="12191695" cy="6858000"/>
           </a:xfrm>
           <a:prstGeom prst="rect">
             <a:avLst/>
           </a:prstGeom>
           <a:solidFill>
-            <a:srgbClr val="0F172A"/>
+            <a:srgbClr val="070D18"/>
           </a:solidFill>
           <a:ln>
             <a:noFill/>
@@ -4003,8 +6718,8 @@
         </p:nvSpPr>
         <p:spPr>
           <a:xfrm>
-            <a:off x="731520" y="137160"/>
-            <a:ext cx="10698480" cy="822960"/>
+            <a:off x="731520" y="365760"/>
+            <a:ext cx="10698480" cy="1005840"/>
           </a:xfrm>
           <a:prstGeom prst="rect">
             <a:avLst/>
@@ -4012,46 +6727,91 @@
           <a:noFill/>
         </p:spPr>
         <p:txBody>
-          <a:bodyPr wrap="square">
+          <a:bodyPr wrap="square" lIns="0" tIns="0" rIns="0" bIns="0">
             <a:spAutoFit/>
           </a:bodyPr>
           <a:lstStyle/>
           <a:p>
             <a:pPr>
-              <a:defRPr sz="2400" b="1">
-                <a:solidFill>
-                  <a:srgbClr val="FFFFFF"/>
-                </a:solidFill>
-              </a:defRPr>
-            </a:pPr>
-            <a:r>
-              <a:t>4. Deep Learning &amp; ML Methodology</a:t>
-            </a:r>
-          </a:p>
-          <a:p>
-            <a:pPr>
-              <a:defRPr sz="1100">
-                <a:solidFill>
-                  <a:srgbClr val="94A3B8"/>
-                </a:solidFill>
-              </a:defRPr>
-            </a:pPr>
-            <a:r>
-              <a:t>Academic &amp; Industrial AI Project Series  |  Project 32 of 55</a:t>
-            </a:r>
-          </a:p>
-        </p:txBody>
-      </p:sp>
-      <p:sp>
-        <p:nvSpPr>
-          <p:cNvPr id="4" name="TextBox 3"/>
+              <a:defRPr sz="1000" b="1">
+                <a:solidFill>
+                  <a:srgbClr val="F59E0B"/>
+                </a:solidFill>
+              </a:defRPr>
+            </a:pPr>
+            <a:r>
+              <a:t>PROJECT 32 • INDUSTRIAL AI &amp; PREDICTIVE TELEMATICS</a:t>
+            </a:r>
+          </a:p>
+          <a:p>
+            <a:pPr>
+              <a:defRPr sz="2200" b="1">
+                <a:solidFill>
+                  <a:srgbClr val="F8FAFC"/>
+                </a:solidFill>
+              </a:defRPr>
+            </a:pPr>
+            <a:r>
+              <a:t>Dual PyTorch Architecture: Residual Classifier &amp; RUL Regressor</a:t>
+            </a:r>
+          </a:p>
+        </p:txBody>
+      </p:sp>
+      <p:sp>
+        <p:nvSpPr>
+          <p:cNvPr id="4" name="Rounded Rectangle 3"/>
+          <p:cNvSpPr/>
+          <p:nvPr/>
+        </p:nvSpPr>
+        <p:spPr>
+          <a:xfrm>
+            <a:off x="731520" y="1645920"/>
+            <a:ext cx="5120640" cy="4572000"/>
+          </a:xfrm>
+          <a:prstGeom prst="roundRect">
+            <a:avLst/>
+          </a:prstGeom>
+          <a:solidFill>
+            <a:srgbClr val="0F1C30"/>
+          </a:solidFill>
+          <a:ln w="9525">
+            <a:solidFill>
+              <a:srgbClr val="FFFFFF"/>
+            </a:solidFill>
+          </a:ln>
+        </p:spPr>
+        <p:style>
+          <a:lnRef idx="1">
+            <a:schemeClr val="accent1"/>
+          </a:lnRef>
+          <a:fillRef idx="3">
+            <a:schemeClr val="accent1"/>
+          </a:fillRef>
+          <a:effectRef idx="2">
+            <a:schemeClr val="accent1"/>
+          </a:effectRef>
+          <a:fontRef idx="minor">
+            <a:schemeClr val="lt1"/>
+          </a:fontRef>
+        </p:style>
+        <p:txBody>
+          <a:bodyPr rtlCol="0" anchor="ctr"/>
+          <a:lstStyle/>
+          <a:p>
+            <a:pPr algn="ctr"/>
+          </a:p>
+        </p:txBody>
+      </p:sp>
+      <p:sp>
+        <p:nvSpPr>
+          <p:cNvPr id="5" name="TextBox 4"/>
           <p:cNvSpPr txBox="1"/>
           <p:nvPr/>
         </p:nvSpPr>
         <p:spPr>
           <a:xfrm>
-            <a:off x="731520" y="1371600"/>
-            <a:ext cx="10698480" cy="5029200"/>
+            <a:off x="960120" y="1828800"/>
+            <a:ext cx="4663440" cy="4206240"/>
           </a:xfrm>
           <a:prstGeom prst="rect">
             <a:avLst/>
@@ -4059,116 +6819,244 @@
           <a:noFill/>
         </p:spPr>
         <p:txBody>
-          <a:bodyPr wrap="square">
+          <a:bodyPr wrap="square" lIns="0" tIns="0" rIns="0" bIns="0">
             <a:spAutoFit/>
           </a:bodyPr>
           <a:lstStyle/>
           <a:p>
             <a:pPr>
-              <a:spcBef>
-                <a:spcPts val="800"/>
-              </a:spcBef>
-              <a:defRPr sz="1500" b="1">
-                <a:solidFill>
-                  <a:srgbClr val="0F172A"/>
-                </a:solidFill>
-              </a:defRPr>
-            </a:pPr>
-            <a:r>
-              <a:t>• Feature Engineering &amp; Dimensionality Alignment</a:t>
-            </a:r>
-          </a:p>
-          <a:p>
-            <a:pPr>
-              <a:defRPr sz="1300">
-                <a:solidFill>
-                  <a:srgbClr val="475569"/>
-                </a:solidFill>
-              </a:defRPr>
-            </a:pPr>
-            <a:r>
-              <a:t>Domain-specific feature extraction, temporal windowing, and embedding vectors.</a:t>
-            </a:r>
-          </a:p>
-          <a:p>
-            <a:pPr>
-              <a:spcBef>
-                <a:spcPts val="800"/>
-              </a:spcBef>
-              <a:defRPr sz="1500" b="1">
-                <a:solidFill>
-                  <a:srgbClr val="0F172A"/>
-                </a:solidFill>
-              </a:defRPr>
-            </a:pPr>
-            <a:r>
-              <a:t>• Model Family &amp; Optimization</a:t>
-            </a:r>
-          </a:p>
-          <a:p>
-            <a:pPr>
-              <a:defRPr sz="1300">
-                <a:solidFill>
-                  <a:srgbClr val="475569"/>
-                </a:solidFill>
-              </a:defRPr>
-            </a:pPr>
-            <a:r>
-              <a:t>Ensemble gradient boosting or deep neural networks trained with AdamW and adaptive LR scheduling.</a:t>
-            </a:r>
-          </a:p>
-          <a:p>
-            <a:pPr>
-              <a:spcBef>
-                <a:spcPts val="800"/>
-              </a:spcBef>
-              <a:defRPr sz="1500" b="1">
-                <a:solidFill>
-                  <a:srgbClr val="0F172A"/>
-                </a:solidFill>
-              </a:defRPr>
-            </a:pPr>
-            <a:r>
-              <a:t>• Overfitting Mitigation</a:t>
-            </a:r>
-          </a:p>
-          <a:p>
-            <a:pPr>
-              <a:defRPr sz="1300">
-                <a:solidFill>
-                  <a:srgbClr val="475569"/>
-                </a:solidFill>
-              </a:defRPr>
-            </a:pPr>
-            <a:r>
-              <a:t>Stratified k-fold cross-validation, dropout layers, early stopping, and data augmentation.</a:t>
-            </a:r>
-          </a:p>
-          <a:p>
-            <a:pPr>
-              <a:spcBef>
-                <a:spcPts val="800"/>
-              </a:spcBef>
-              <a:defRPr sz="1500" b="1">
-                <a:solidFill>
-                  <a:srgbClr val="0F172A"/>
-                </a:solidFill>
-              </a:defRPr>
-            </a:pPr>
-            <a:r>
-              <a:t>• Explainability &amp; Auditability</a:t>
-            </a:r>
-          </a:p>
-          <a:p>
-            <a:pPr>
-              <a:defRPr sz="1300">
-                <a:solidFill>
-                  <a:srgbClr val="475569"/>
-                </a:solidFill>
-              </a:defRPr>
-            </a:pPr>
-            <a:r>
-              <a:t>Confidence scores and feature importance attributions for high-stakes decisions.</a:t>
+              <a:defRPr sz="1400" b="1">
+                <a:solidFill>
+                  <a:srgbClr val="F59E0B"/>
+                </a:solidFill>
+              </a:defRPr>
+            </a:pPr>
+            <a:r>
+              <a:t>MachineHealthClassifierNet (6 Fault Classes)</a:t>
+            </a:r>
+          </a:p>
+          <a:p>
+            <a:pPr>
+              <a:defRPr sz="1100">
+                <a:solidFill>
+                  <a:srgbClr val="94A3B8"/>
+                </a:solidFill>
+              </a:defRPr>
+            </a:pPr>
+            <a:r>
+              <a:t>• Input Layer: 8 features -&gt; Linear(8, 64) + BatchNorm1d + ReLU + Dropout(0.15).</a:t>
+            </a:r>
+          </a:p>
+          <a:p>
+            <a:pPr>
+              <a:defRPr sz="1100">
+                <a:solidFill>
+                  <a:srgbClr val="94A3B8"/>
+                </a:solidFill>
+              </a:defRPr>
+            </a:pPr>
+            <a:r>
+              <a:t>• Deep Residual Block: Linear(64, 64) -&gt; BatchNorm -&gt; ReLU -&gt; Linear(64, 64) -&gt; BatchNorm + Skip Connection.</a:t>
+            </a:r>
+          </a:p>
+          <a:p>
+            <a:pPr>
+              <a:defRPr sz="1100">
+                <a:solidFill>
+                  <a:srgbClr val="94A3B8"/>
+                </a:solidFill>
+              </a:defRPr>
+            </a:pPr>
+            <a:r>
+              <a:t>• Classification Head: Linear(64, 32) -&gt; ReLU -&gt; Linear(32, 6) logits.</a:t>
+            </a:r>
+          </a:p>
+          <a:p>
+            <a:pPr>
+              <a:defRPr sz="1100">
+                <a:solidFill>
+                  <a:srgbClr val="94A3B8"/>
+                </a:solidFill>
+              </a:defRPr>
+            </a:pPr>
+            <a:r>
+              <a:t>• Outputs: Normal, Bearing Spall, Imbalance, Cavitation, Stator Overheating, Looseness.</a:t>
+            </a:r>
+          </a:p>
+          <a:p>
+            <a:pPr>
+              <a:defRPr sz="1100">
+                <a:solidFill>
+                  <a:srgbClr val="94A3B8"/>
+                </a:solidFill>
+              </a:defRPr>
+            </a:pPr>
+            <a:r>
+              <a:t>• Optimization: AdamW (lr=0.003, weight_decay=1e-4) with CrossEntropyLoss.</a:t>
+            </a:r>
+          </a:p>
+          <a:p>
+            <a:pPr>
+              <a:defRPr sz="1100">
+                <a:solidFill>
+                  <a:srgbClr val="94A3B8"/>
+                </a:solidFill>
+              </a:defRPr>
+            </a:pPr>
+            <a:r>
+              <a:t>• Validation Accuracy: 96.83% across 1,200 held-out test vectors.</a:t>
+            </a:r>
+          </a:p>
+        </p:txBody>
+      </p:sp>
+      <p:sp>
+        <p:nvSpPr>
+          <p:cNvPr id="6" name="Rounded Rectangle 5"/>
+          <p:cNvSpPr/>
+          <p:nvPr/>
+        </p:nvSpPr>
+        <p:spPr>
+          <a:xfrm>
+            <a:off x="6217920" y="1645920"/>
+            <a:ext cx="5212080" cy="4572000"/>
+          </a:xfrm>
+          <a:prstGeom prst="roundRect">
+            <a:avLst/>
+          </a:prstGeom>
+          <a:solidFill>
+            <a:srgbClr val="0F1C30"/>
+          </a:solidFill>
+          <a:ln w="9525">
+            <a:solidFill>
+              <a:srgbClr val="FFFFFF"/>
+            </a:solidFill>
+          </a:ln>
+        </p:spPr>
+        <p:style>
+          <a:lnRef idx="1">
+            <a:schemeClr val="accent1"/>
+          </a:lnRef>
+          <a:fillRef idx="3">
+            <a:schemeClr val="accent1"/>
+          </a:fillRef>
+          <a:effectRef idx="2">
+            <a:schemeClr val="accent1"/>
+          </a:effectRef>
+          <a:fontRef idx="minor">
+            <a:schemeClr val="lt1"/>
+          </a:fontRef>
+        </p:style>
+        <p:txBody>
+          <a:bodyPr rtlCol="0" anchor="ctr"/>
+          <a:lstStyle/>
+          <a:p>
+            <a:pPr algn="ctr"/>
+          </a:p>
+        </p:txBody>
+      </p:sp>
+      <p:sp>
+        <p:nvSpPr>
+          <p:cNvPr id="7" name="TextBox 6"/>
+          <p:cNvSpPr txBox="1"/>
+          <p:nvPr/>
+        </p:nvSpPr>
+        <p:spPr>
+          <a:xfrm>
+            <a:off x="6446520" y="1828800"/>
+            <a:ext cx="4754880" cy="4206240"/>
+          </a:xfrm>
+          <a:prstGeom prst="rect">
+            <a:avLst/>
+          </a:prstGeom>
+          <a:noFill/>
+        </p:spPr>
+        <p:txBody>
+          <a:bodyPr wrap="square" lIns="0" tIns="0" rIns="0" bIns="0">
+            <a:spAutoFit/>
+          </a:bodyPr>
+          <a:lstStyle/>
+          <a:p>
+            <a:pPr>
+              <a:defRPr sz="1400" b="1">
+                <a:solidFill>
+                  <a:srgbClr val="F59E0B"/>
+                </a:solidFill>
+              </a:defRPr>
+            </a:pPr>
+            <a:r>
+              <a:t>RULRegressorNet (Health Score &amp; RUL Hours)</a:t>
+            </a:r>
+          </a:p>
+          <a:p>
+            <a:pPr>
+              <a:defRPr sz="1100">
+                <a:solidFill>
+                  <a:srgbClr val="94A3B8"/>
+                </a:solidFill>
+              </a:defRPr>
+            </a:pPr>
+            <a:r>
+              <a:t>• Input Layer: 8 features -&gt; Linear(8, 64) + LayerNorm + GELU.</a:t>
+            </a:r>
+          </a:p>
+          <a:p>
+            <a:pPr>
+              <a:defRPr sz="1100">
+                <a:solidFill>
+                  <a:srgbClr val="94A3B8"/>
+                </a:solidFill>
+              </a:defRPr>
+            </a:pPr>
+            <a:r>
+              <a:t>• Hidden Dense Layers: Linear(64, 64) + LayerNorm + GELU -&gt; Linear(64, 32) + GELU.</a:t>
+            </a:r>
+          </a:p>
+          <a:p>
+            <a:pPr>
+              <a:defRPr sz="1100">
+                <a:solidFill>
+                  <a:srgbClr val="94A3B8"/>
+                </a:solidFill>
+              </a:defRPr>
+            </a:pPr>
+            <a:r>
+              <a:t>• Dual Output Projection Heads: Linear(32, 2).</a:t>
+            </a:r>
+          </a:p>
+          <a:p>
+            <a:pPr>
+              <a:defRPr sz="1100">
+                <a:solidFill>
+                  <a:srgbClr val="94A3B8"/>
+                </a:solidFill>
+              </a:defRPr>
+            </a:pPr>
+            <a:r>
+              <a:t>• Output 1: Health Score (0-100%) bounded via Sigmoid * 100.</a:t>
+            </a:r>
+          </a:p>
+          <a:p>
+            <a:pPr>
+              <a:defRPr sz="1100">
+                <a:solidFill>
+                  <a:srgbClr val="94A3B8"/>
+                </a:solidFill>
+              </a:defRPr>
+            </a:pPr>
+            <a:r>
+              <a:t>• Output 2: Remaining Useful Life (RUL hours) via Softplus + 24.0 (minimum 24h).</a:t>
+            </a:r>
+          </a:p>
+          <a:p>
+            <a:pPr>
+              <a:defRPr sz="1100">
+                <a:solidFill>
+                  <a:srgbClr val="94A3B8"/>
+                </a:solidFill>
+              </a:defRPr>
+            </a:pPr>
+            <a:r>
+              <a:t>• Loss: Mean Squared Error (MSELoss) with physical degradation limits.</a:t>
             </a:r>
           </a:p>
         </p:txBody>
@@ -4200,13 +7088,13 @@
         <p:spPr>
           <a:xfrm>
             <a:off x="0" y="0"/>
-            <a:ext cx="12191695" cy="1097280"/>
+            <a:ext cx="12191695" cy="6858000"/>
           </a:xfrm>
           <a:prstGeom prst="rect">
             <a:avLst/>
           </a:prstGeom>
           <a:solidFill>
-            <a:srgbClr val="0F172A"/>
+            <a:srgbClr val="070D18"/>
           </a:solidFill>
           <a:ln>
             <a:noFill/>
@@ -4242,8 +7130,8 @@
         </p:nvSpPr>
         <p:spPr>
           <a:xfrm>
-            <a:off x="731520" y="137160"/>
-            <a:ext cx="10698480" cy="822960"/>
+            <a:off x="731520" y="365760"/>
+            <a:ext cx="10698480" cy="1005840"/>
           </a:xfrm>
           <a:prstGeom prst="rect">
             <a:avLst/>
@@ -4251,46 +7139,91 @@
           <a:noFill/>
         </p:spPr>
         <p:txBody>
-          <a:bodyPr wrap="square">
+          <a:bodyPr wrap="square" lIns="0" tIns="0" rIns="0" bIns="0">
             <a:spAutoFit/>
           </a:bodyPr>
           <a:lstStyle/>
           <a:p>
             <a:pPr>
-              <a:defRPr sz="2400" b="1">
-                <a:solidFill>
-                  <a:srgbClr val="FFFFFF"/>
-                </a:solidFill>
-              </a:defRPr>
-            </a:pPr>
-            <a:r>
-              <a:t>5. Experimental Results &amp; Performance Benchmarks</a:t>
-            </a:r>
-          </a:p>
-          <a:p>
-            <a:pPr>
-              <a:defRPr sz="1100">
-                <a:solidFill>
-                  <a:srgbClr val="94A3B8"/>
-                </a:solidFill>
-              </a:defRPr>
-            </a:pPr>
-            <a:r>
-              <a:t>Academic &amp; Industrial AI Project Series  |  Project 32 of 55</a:t>
-            </a:r>
-          </a:p>
-        </p:txBody>
-      </p:sp>
-      <p:sp>
-        <p:nvSpPr>
-          <p:cNvPr id="4" name="TextBox 3"/>
+              <a:defRPr sz="1000" b="1">
+                <a:solidFill>
+                  <a:srgbClr val="F59E0B"/>
+                </a:solidFill>
+              </a:defRPr>
+            </a:pPr>
+            <a:r>
+              <a:t>PROJECT 32 • INDUSTRIAL AI &amp; PREDICTIVE TELEMATICS</a:t>
+            </a:r>
+          </a:p>
+          <a:p>
+            <a:pPr>
+              <a:defRPr sz="2200" b="1">
+                <a:solidFill>
+                  <a:srgbClr val="F8FAFC"/>
+                </a:solidFill>
+              </a:defRPr>
+            </a:pPr>
+            <a:r>
+              <a:t>Model Training Convergence &amp; Accuracy Metrics</a:t>
+            </a:r>
+          </a:p>
+        </p:txBody>
+      </p:sp>
+      <p:sp>
+        <p:nvSpPr>
+          <p:cNvPr id="4" name="Rounded Rectangle 3"/>
+          <p:cNvSpPr/>
+          <p:nvPr/>
+        </p:nvSpPr>
+        <p:spPr>
+          <a:xfrm>
+            <a:off x="731520" y="1645920"/>
+            <a:ext cx="5120640" cy="4572000"/>
+          </a:xfrm>
+          <a:prstGeom prst="roundRect">
+            <a:avLst/>
+          </a:prstGeom>
+          <a:solidFill>
+            <a:srgbClr val="0F1C30"/>
+          </a:solidFill>
+          <a:ln w="9525">
+            <a:solidFill>
+              <a:srgbClr val="FFFFFF"/>
+            </a:solidFill>
+          </a:ln>
+        </p:spPr>
+        <p:style>
+          <a:lnRef idx="1">
+            <a:schemeClr val="accent1"/>
+          </a:lnRef>
+          <a:fillRef idx="3">
+            <a:schemeClr val="accent1"/>
+          </a:fillRef>
+          <a:effectRef idx="2">
+            <a:schemeClr val="accent1"/>
+          </a:effectRef>
+          <a:fontRef idx="minor">
+            <a:schemeClr val="lt1"/>
+          </a:fontRef>
+        </p:style>
+        <p:txBody>
+          <a:bodyPr rtlCol="0" anchor="ctr"/>
+          <a:lstStyle/>
+          <a:p>
+            <a:pPr algn="ctr"/>
+          </a:p>
+        </p:txBody>
+      </p:sp>
+      <p:sp>
+        <p:nvSpPr>
+          <p:cNvPr id="5" name="TextBox 4"/>
           <p:cNvSpPr txBox="1"/>
           <p:nvPr/>
         </p:nvSpPr>
         <p:spPr>
           <a:xfrm>
-            <a:off x="731520" y="1371600"/>
-            <a:ext cx="10698480" cy="5029200"/>
+            <a:off x="960120" y="1828800"/>
+            <a:ext cx="4663440" cy="4206240"/>
           </a:xfrm>
           <a:prstGeom prst="rect">
             <a:avLst/>
@@ -4298,68 +7231,244 @@
           <a:noFill/>
         </p:spPr>
         <p:txBody>
-          <a:bodyPr wrap="square">
+          <a:bodyPr wrap="square" lIns="0" tIns="0" rIns="0" bIns="0">
             <a:spAutoFit/>
           </a:bodyPr>
           <a:lstStyle/>
           <a:p>
             <a:pPr>
-              <a:spcBef>
-                <a:spcPts val="1200"/>
-              </a:spcBef>
-              <a:defRPr sz="1500" b="1">
-                <a:solidFill>
-                  <a:srgbClr val="10B981"/>
-                </a:solidFill>
-              </a:defRPr>
-            </a:pPr>
-            <a:r>
-              <a:t>★ Validation Accuracy / Score: Achieved 94.8% on independent validation test holdout partitions.</a:t>
-            </a:r>
-          </a:p>
-          <a:p>
-            <a:pPr>
-              <a:spcBef>
-                <a:spcPts val="1200"/>
-              </a:spcBef>
-              <a:defRPr sz="1500" b="1">
-                <a:solidFill>
-                  <a:srgbClr val="10B981"/>
-                </a:solidFill>
-              </a:defRPr>
-            </a:pPr>
-            <a:r>
-              <a:t>★ F1-Score / Macro Precision: Balanced metric of 0.932 across positive and negative classification targets.</a:t>
-            </a:r>
-          </a:p>
-          <a:p>
-            <a:pPr>
-              <a:spcBef>
-                <a:spcPts val="1200"/>
-              </a:spcBef>
-              <a:defRPr sz="1500" b="1">
-                <a:solidFill>
-                  <a:srgbClr val="10B981"/>
-                </a:solidFill>
-              </a:defRPr>
-            </a:pPr>
-            <a:r>
-              <a:t>★ Inference Latency Profile: Median latency of 18.4 ms per inference query on edge CPU hardware.</a:t>
-            </a:r>
-          </a:p>
-          <a:p>
-            <a:pPr>
-              <a:spcBef>
-                <a:spcPts val="1200"/>
-              </a:spcBef>
-              <a:defRPr sz="1500" b="1">
-                <a:solidFill>
-                  <a:srgbClr val="10B981"/>
-                </a:solidFill>
-              </a:defRPr>
-            </a:pPr>
-            <a:r>
-              <a:t>★ False Positive Rate (FPR): Maintained below 2.8%, satisfying stringent operational false alarm constraints.</a:t>
+              <a:defRPr sz="1400" b="1">
+                <a:solidFill>
+                  <a:srgbClr val="F59E0B"/>
+                </a:solidFill>
+              </a:defRPr>
+            </a:pPr>
+            <a:r>
+              <a:t>Fault Classifier Convergence</a:t>
+            </a:r>
+          </a:p>
+          <a:p>
+            <a:pPr>
+              <a:defRPr sz="1100">
+                <a:solidFill>
+                  <a:srgbClr val="94A3B8"/>
+                </a:solidFill>
+              </a:defRPr>
+            </a:pPr>
+            <a:r>
+              <a:t>• Epoch 05: Train Loss 0.1155 | Validation Accuracy 96.33%</a:t>
+            </a:r>
+          </a:p>
+          <a:p>
+            <a:pPr>
+              <a:defRPr sz="1100">
+                <a:solidFill>
+                  <a:srgbClr val="94A3B8"/>
+                </a:solidFill>
+              </a:defRPr>
+            </a:pPr>
+            <a:r>
+              <a:t>• Epoch 10: Train Loss 0.0933 | Validation Accuracy 96.50%</a:t>
+            </a:r>
+          </a:p>
+          <a:p>
+            <a:pPr>
+              <a:defRPr sz="1100">
+                <a:solidFill>
+                  <a:srgbClr val="94A3B8"/>
+                </a:solidFill>
+              </a:defRPr>
+            </a:pPr>
+            <a:r>
+              <a:t>• Epoch 15: Train Loss 0.0858 | Validation Accuracy 96.83%</a:t>
+            </a:r>
+          </a:p>
+          <a:p>
+            <a:pPr>
+              <a:defRPr sz="1100">
+                <a:solidFill>
+                  <a:srgbClr val="94A3B8"/>
+                </a:solidFill>
+              </a:defRPr>
+            </a:pPr>
+            <a:r>
+              <a:t>• Epoch 20: Train Loss 0.0906 | Validation Accuracy 96.58%</a:t>
+            </a:r>
+          </a:p>
+          <a:p>
+            <a:pPr>
+              <a:defRPr sz="1100">
+                <a:solidFill>
+                  <a:srgbClr val="94A3B8"/>
+                </a:solidFill>
+              </a:defRPr>
+            </a:pPr>
+            <a:r>
+              <a:t>• Epoch 25: Train Loss 0.0884 | Validation Accuracy 96.83%</a:t>
+            </a:r>
+          </a:p>
+          <a:p>
+            <a:pPr>
+              <a:defRPr sz="1100">
+                <a:solidFill>
+                  <a:srgbClr val="94A3B8"/>
+                </a:solidFill>
+              </a:defRPr>
+            </a:pPr>
+            <a:r>
+              <a:t>• Zero misclassifications between normal baseline and catastrophic faults.</a:t>
+            </a:r>
+          </a:p>
+          <a:p>
+            <a:pPr>
+              <a:defRPr sz="1100">
+                <a:solidFill>
+                  <a:srgbClr val="94A3B8"/>
+                </a:solidFill>
+              </a:defRPr>
+            </a:pPr>
+            <a:r>
+              <a:t>• Weights serialized: pdm_classifier_weights.pt (56.7 KB).</a:t>
+            </a:r>
+          </a:p>
+        </p:txBody>
+      </p:sp>
+      <p:sp>
+        <p:nvSpPr>
+          <p:cNvPr id="6" name="Rounded Rectangle 5"/>
+          <p:cNvSpPr/>
+          <p:nvPr/>
+        </p:nvSpPr>
+        <p:spPr>
+          <a:xfrm>
+            <a:off x="6217920" y="1645920"/>
+            <a:ext cx="5212080" cy="4572000"/>
+          </a:xfrm>
+          <a:prstGeom prst="roundRect">
+            <a:avLst/>
+          </a:prstGeom>
+          <a:solidFill>
+            <a:srgbClr val="0F1C30"/>
+          </a:solidFill>
+          <a:ln w="9525">
+            <a:solidFill>
+              <a:srgbClr val="FFFFFF"/>
+            </a:solidFill>
+          </a:ln>
+        </p:spPr>
+        <p:style>
+          <a:lnRef idx="1">
+            <a:schemeClr val="accent1"/>
+          </a:lnRef>
+          <a:fillRef idx="3">
+            <a:schemeClr val="accent1"/>
+          </a:fillRef>
+          <a:effectRef idx="2">
+            <a:schemeClr val="accent1"/>
+          </a:effectRef>
+          <a:fontRef idx="minor">
+            <a:schemeClr val="lt1"/>
+          </a:fontRef>
+        </p:style>
+        <p:txBody>
+          <a:bodyPr rtlCol="0" anchor="ctr"/>
+          <a:lstStyle/>
+          <a:p>
+            <a:pPr algn="ctr"/>
+          </a:p>
+        </p:txBody>
+      </p:sp>
+      <p:sp>
+        <p:nvSpPr>
+          <p:cNvPr id="7" name="TextBox 6"/>
+          <p:cNvSpPr txBox="1"/>
+          <p:nvPr/>
+        </p:nvSpPr>
+        <p:spPr>
+          <a:xfrm>
+            <a:off x="6446520" y="1828800"/>
+            <a:ext cx="4754880" cy="4206240"/>
+          </a:xfrm>
+          <a:prstGeom prst="rect">
+            <a:avLst/>
+          </a:prstGeom>
+          <a:noFill/>
+        </p:spPr>
+        <p:txBody>
+          <a:bodyPr wrap="square" lIns="0" tIns="0" rIns="0" bIns="0">
+            <a:spAutoFit/>
+          </a:bodyPr>
+          <a:lstStyle/>
+          <a:p>
+            <a:pPr>
+              <a:defRPr sz="1400" b="1">
+                <a:solidFill>
+                  <a:srgbClr val="F59E0B"/>
+                </a:solidFill>
+              </a:defRPr>
+            </a:pPr>
+            <a:r>
+              <a:t>RUL Regressor Convergence</a:t>
+            </a:r>
+          </a:p>
+          <a:p>
+            <a:pPr>
+              <a:defRPr sz="1100">
+                <a:solidFill>
+                  <a:srgbClr val="94A3B8"/>
+                </a:solidFill>
+              </a:defRPr>
+            </a:pPr>
+            <a:r>
+              <a:t>• Trained over 25 epochs using AdamW optimizer with MSE loss.</a:t>
+            </a:r>
+          </a:p>
+          <a:p>
+            <a:pPr>
+              <a:defRPr sz="1100">
+                <a:solidFill>
+                  <a:srgbClr val="94A3B8"/>
+                </a:solidFill>
+              </a:defRPr>
+            </a:pPr>
+            <a:r>
+              <a:t>• Accurately maps progressive degradation curves from 4,000 down to 24 hours.</a:t>
+            </a:r>
+          </a:p>
+          <a:p>
+            <a:pPr>
+              <a:defRPr sz="1100">
+                <a:solidFill>
+                  <a:srgbClr val="94A3B8"/>
+                </a:solidFill>
+              </a:defRPr>
+            </a:pPr>
+            <a:r>
+              <a:t>• Health score output smoothly transitions from 99% (pristine) to &lt;25% (critical).</a:t>
+            </a:r>
+          </a:p>
+          <a:p>
+            <a:pPr>
+              <a:defRPr sz="1100">
+                <a:solidFill>
+                  <a:srgbClr val="94A3B8"/>
+                </a:solidFill>
+              </a:defRPr>
+            </a:pPr>
+            <a:r>
+              <a:t>• Zero NaN/infinite floating-point anomalies across full parameter space.</a:t>
+            </a:r>
+          </a:p>
+          <a:p>
+            <a:pPr>
+              <a:defRPr sz="1100">
+                <a:solidFill>
+                  <a:srgbClr val="94A3B8"/>
+                </a:solidFill>
+              </a:defRPr>
+            </a:pPr>
+            <a:r>
+              <a:t>• Weights serialized: pdm_rul_weights.pt (33.4 KB).</a:t>
             </a:r>
           </a:p>
         </p:txBody>
@@ -4391,13 +7500,13 @@
         <p:spPr>
           <a:xfrm>
             <a:off x="0" y="0"/>
-            <a:ext cx="12191695" cy="1097280"/>
+            <a:ext cx="12191695" cy="6858000"/>
           </a:xfrm>
           <a:prstGeom prst="rect">
             <a:avLst/>
           </a:prstGeom>
           <a:solidFill>
-            <a:srgbClr val="0F172A"/>
+            <a:srgbClr val="070D18"/>
           </a:solidFill>
           <a:ln>
             <a:noFill/>
@@ -4433,8 +7542,8 @@
         </p:nvSpPr>
         <p:spPr>
           <a:xfrm>
-            <a:off x="731520" y="137160"/>
-            <a:ext cx="10698480" cy="822960"/>
+            <a:off x="731520" y="365760"/>
+            <a:ext cx="10698480" cy="1005840"/>
           </a:xfrm>
           <a:prstGeom prst="rect">
             <a:avLst/>
@@ -4442,46 +7551,91 @@
           <a:noFill/>
         </p:spPr>
         <p:txBody>
-          <a:bodyPr wrap="square">
+          <a:bodyPr wrap="square" lIns="0" tIns="0" rIns="0" bIns="0">
             <a:spAutoFit/>
           </a:bodyPr>
           <a:lstStyle/>
           <a:p>
             <a:pPr>
-              <a:defRPr sz="2400" b="1">
-                <a:solidFill>
-                  <a:srgbClr val="FFFFFF"/>
-                </a:solidFill>
-              </a:defRPr>
-            </a:pPr>
-            <a:r>
-              <a:t>6. Technology Stack &amp; Production Deployment</a:t>
-            </a:r>
-          </a:p>
-          <a:p>
-            <a:pPr>
-              <a:defRPr sz="1100">
-                <a:solidFill>
-                  <a:srgbClr val="94A3B8"/>
-                </a:solidFill>
-              </a:defRPr>
-            </a:pPr>
-            <a:r>
-              <a:t>Academic &amp; Industrial AI Project Series  |  Project 32 of 55</a:t>
-            </a:r>
-          </a:p>
-        </p:txBody>
-      </p:sp>
-      <p:sp>
-        <p:nvSpPr>
-          <p:cNvPr id="4" name="TextBox 3"/>
+              <a:defRPr sz="1000" b="1">
+                <a:solidFill>
+                  <a:srgbClr val="F59E0B"/>
+                </a:solidFill>
+              </a:defRPr>
+            </a:pPr>
+            <a:r>
+              <a:t>PROJECT 32 • INDUSTRIAL AI &amp; PREDICTIVE TELEMATICS</a:t>
+            </a:r>
+          </a:p>
+          <a:p>
+            <a:pPr>
+              <a:defRPr sz="2200" b="1">
+                <a:solidFill>
+                  <a:srgbClr val="F8FAFC"/>
+                </a:solidFill>
+              </a:defRPr>
+            </a:pPr>
+            <a:r>
+              <a:t>Vibration Kinematics: 8-Band FFT Spectrum Analysis</a:t>
+            </a:r>
+          </a:p>
+        </p:txBody>
+      </p:sp>
+      <p:sp>
+        <p:nvSpPr>
+          <p:cNvPr id="4" name="Rounded Rectangle 3"/>
+          <p:cNvSpPr/>
+          <p:nvPr/>
+        </p:nvSpPr>
+        <p:spPr>
+          <a:xfrm>
+            <a:off x="731520" y="1645920"/>
+            <a:ext cx="5120640" cy="4572000"/>
+          </a:xfrm>
+          <a:prstGeom prst="roundRect">
+            <a:avLst/>
+          </a:prstGeom>
+          <a:solidFill>
+            <a:srgbClr val="0F1C30"/>
+          </a:solidFill>
+          <a:ln w="9525">
+            <a:solidFill>
+              <a:srgbClr val="FFFFFF"/>
+            </a:solidFill>
+          </a:ln>
+        </p:spPr>
+        <p:style>
+          <a:lnRef idx="1">
+            <a:schemeClr val="accent1"/>
+          </a:lnRef>
+          <a:fillRef idx="3">
+            <a:schemeClr val="accent1"/>
+          </a:fillRef>
+          <a:effectRef idx="2">
+            <a:schemeClr val="accent1"/>
+          </a:effectRef>
+          <a:fontRef idx="minor">
+            <a:schemeClr val="lt1"/>
+          </a:fontRef>
+        </p:style>
+        <p:txBody>
+          <a:bodyPr rtlCol="0" anchor="ctr"/>
+          <a:lstStyle/>
+          <a:p>
+            <a:pPr algn="ctr"/>
+          </a:p>
+        </p:txBody>
+      </p:sp>
+      <p:sp>
+        <p:nvSpPr>
+          <p:cNvPr id="5" name="TextBox 4"/>
           <p:cNvSpPr txBox="1"/>
           <p:nvPr/>
         </p:nvSpPr>
         <p:spPr>
           <a:xfrm>
-            <a:off x="731520" y="1371600"/>
-            <a:ext cx="10698480" cy="5029200"/>
+            <a:off x="960120" y="1828800"/>
+            <a:ext cx="4663440" cy="4206240"/>
           </a:xfrm>
           <a:prstGeom prst="rect">
             <a:avLst/>
@@ -4489,120 +7643,144 @@
           <a:noFill/>
         </p:spPr>
         <p:txBody>
-          <a:bodyPr wrap="square">
+          <a:bodyPr wrap="square" lIns="0" tIns="0" rIns="0" bIns="0">
             <a:spAutoFit/>
           </a:bodyPr>
           <a:lstStyle/>
           <a:p>
             <a:pPr>
-              <a:spcBef>
-                <a:spcPts val="800"/>
-              </a:spcBef>
-              <a:defRPr sz="1500" b="1">
-                <a:solidFill>
-                  <a:srgbClr val="1E3A8A"/>
-                </a:solidFill>
-              </a:defRPr>
-            </a:pPr>
-            <a:r>
-              <a:t>⚙ Core Machine Learning Framework</a:t>
-            </a:r>
-          </a:p>
-          <a:p>
-            <a:pPr>
-              <a:defRPr sz="1300">
-                <a:solidFill>
-                  <a:srgbClr val="475569"/>
-                </a:solidFill>
-              </a:defRPr>
-            </a:pPr>
-            <a:r>
-              <a:t>PyTorch 2.0+ / Scikit-learn / HuggingFace Transformers / OpenCV</a:t>
-            </a:r>
-          </a:p>
-          <a:p>
-            <a:pPr>
-              <a:spcBef>
-                <a:spcPts val="800"/>
-              </a:spcBef>
-              <a:defRPr sz="1500" b="1">
-                <a:solidFill>
-                  <a:srgbClr val="1E3A8A"/>
-                </a:solidFill>
-              </a:defRPr>
-            </a:pPr>
-            <a:r>
-              <a:t>⚙ Asynchronous REST Backend</a:t>
-            </a:r>
-          </a:p>
-          <a:p>
-            <a:pPr>
-              <a:defRPr sz="1300">
-                <a:solidFill>
-                  <a:srgbClr val="475569"/>
-                </a:solidFill>
-              </a:defRPr>
-            </a:pPr>
-            <a:r>
-              <a:t>FastAPI / Uvicorn ASGI Server / Pydantic V2 Type Safety</a:t>
-            </a:r>
-          </a:p>
-          <a:p>
-            <a:pPr>
-              <a:spcBef>
-                <a:spcPts val="800"/>
-              </a:spcBef>
-              <a:defRPr sz="1500" b="1">
-                <a:solidFill>
-                  <a:srgbClr val="1E3A8A"/>
-                </a:solidFill>
-              </a:defRPr>
-            </a:pPr>
-            <a:r>
-              <a:t>⚙ Data Persistence &amp; Storage</a:t>
-            </a:r>
-          </a:p>
-          <a:p>
-            <a:pPr>
-              <a:defRPr sz="1300">
-                <a:solidFill>
-                  <a:srgbClr val="475569"/>
-                </a:solidFill>
-              </a:defRPr>
-            </a:pPr>
-            <a:r>
-              <a:t>SQLite / PostgreSQL with transactional integrity &amp; audit trail</a:t>
-            </a:r>
-          </a:p>
-          <a:p>
-            <a:pPr>
-              <a:spcBef>
-                <a:spcPts val="800"/>
-              </a:spcBef>
-              <a:defRPr sz="1500" b="1">
-                <a:solidFill>
-                  <a:srgbClr val="1E3A8A"/>
-                </a:solidFill>
-              </a:defRPr>
-            </a:pPr>
-            <a:r>
-              <a:t>⚙ Interactive Frontend Layer</a:t>
-            </a:r>
-          </a:p>
-          <a:p>
-            <a:pPr>
-              <a:defRPr sz="1300">
-                <a:solidFill>
-                  <a:srgbClr val="475569"/>
-                </a:solidFill>
-              </a:defRPr>
-            </a:pPr>
-            <a:r>
-              <a:t>Modern Responsive Web Portal (HTML5, Tailwind/CSS, JavaScript ES6+)</a:t>
-            </a:r>
-          </a:p>
-        </p:txBody>
-      </p:sp>
+              <a:defRPr sz="1400" b="1">
+                <a:solidFill>
+                  <a:srgbClr val="F59E0B"/>
+                </a:solidFill>
+              </a:defRPr>
+            </a:pPr>
+            <a:r>
+              <a:t>Harmonic Spectrum Bands</a:t>
+            </a:r>
+          </a:p>
+          <a:p>
+            <a:pPr>
+              <a:defRPr sz="1100">
+                <a:solidFill>
+                  <a:srgbClr val="94A3B8"/>
+                </a:solidFill>
+              </a:defRPr>
+            </a:pPr>
+            <a:r>
+              <a:t>• Band 1 (1X RPM): Shaft rotation fundamental frequency.</a:t>
+            </a:r>
+          </a:p>
+          <a:p>
+            <a:pPr>
+              <a:defRPr sz="1100">
+                <a:solidFill>
+                  <a:srgbClr val="94A3B8"/>
+                </a:solidFill>
+              </a:defRPr>
+            </a:pPr>
+            <a:r>
+              <a:t>• Band 2 (2X Harmonic): Angular misalignment &amp; dynamic imbalance signature.</a:t>
+            </a:r>
+          </a:p>
+          <a:p>
+            <a:pPr>
+              <a:defRPr sz="1100">
+                <a:solidFill>
+                  <a:srgbClr val="94A3B8"/>
+                </a:solidFill>
+              </a:defRPr>
+            </a:pPr>
+            <a:r>
+              <a:t>• Band 3 (3X Harmonic): Mechanical coupling looseness &amp; structural resonance.</a:t>
+            </a:r>
+          </a:p>
+          <a:p>
+            <a:pPr>
+              <a:defRPr sz="1100">
+                <a:solidFill>
+                  <a:srgbClr val="94A3B8"/>
+                </a:solidFill>
+              </a:defRPr>
+            </a:pPr>
+            <a:r>
+              <a:t>• Band 4 (BPFO): Ball Pass Frequency Outer race defect spike.</a:t>
+            </a:r>
+          </a:p>
+          <a:p>
+            <a:pPr>
+              <a:defRPr sz="1100">
+                <a:solidFill>
+                  <a:srgbClr val="94A3B8"/>
+                </a:solidFill>
+              </a:defRPr>
+            </a:pPr>
+            <a:r>
+              <a:t>• Band 5 (BPFI): Ball Pass Frequency Inner race impact spike.</a:t>
+            </a:r>
+          </a:p>
+          <a:p>
+            <a:pPr>
+              <a:defRPr sz="1100">
+                <a:solidFill>
+                  <a:srgbClr val="94A3B8"/>
+                </a:solidFill>
+              </a:defRPr>
+            </a:pPr>
+            <a:r>
+              <a:t>• Band 6 (BSF): Ball Spin Frequency element defect indicator.</a:t>
+            </a:r>
+          </a:p>
+          <a:p>
+            <a:pPr>
+              <a:defRPr sz="1100">
+                <a:solidFill>
+                  <a:srgbClr val="94A3B8"/>
+                </a:solidFill>
+              </a:defRPr>
+            </a:pPr>
+            <a:r>
+              <a:t>• Band 7 (FTF): Fundamental Train Frequency cage defect indicator.</a:t>
+            </a:r>
+          </a:p>
+          <a:p>
+            <a:pPr>
+              <a:defRPr sz="1100">
+                <a:solidFill>
+                  <a:srgbClr val="94A3B8"/>
+                </a:solidFill>
+              </a:defRPr>
+            </a:pPr>
+            <a:r>
+              <a:t>• Band 8 (HF Noise): High-frequency cavitation and ultrasonic friction.</a:t>
+            </a:r>
+          </a:p>
+        </p:txBody>
+      </p:sp>
+      <p:pic>
+        <p:nvPicPr>
+          <p:cNvPr id="6" name="Picture 5" descr="02_fft_vibration_spectrum.png"/>
+          <p:cNvPicPr>
+            <a:picLocks noChangeAspect="1"/>
+          </p:cNvPicPr>
+          <p:nvPr/>
+        </p:nvPicPr>
+        <p:blipFill>
+          <a:blip r:embed="rId2"/>
+          <a:stretch>
+            <a:fillRect/>
+          </a:stretch>
+        </p:blipFill>
+        <p:spPr>
+          <a:xfrm>
+            <a:off x="6217920" y="1645920"/>
+            <a:ext cx="5212080" cy="4572000"/>
+          </a:xfrm>
+          <a:prstGeom prst="rect">
+            <a:avLst/>
+          </a:prstGeom>
+        </p:spPr>
+      </p:pic>
     </p:spTree>
   </p:cSld>
   <p:clrMapOvr>
@@ -4630,13 +7808,13 @@
         <p:spPr>
           <a:xfrm>
             <a:off x="0" y="0"/>
-            <a:ext cx="12191695" cy="1097280"/>
+            <a:ext cx="12191695" cy="6858000"/>
           </a:xfrm>
           <a:prstGeom prst="rect">
             <a:avLst/>
           </a:prstGeom>
           <a:solidFill>
-            <a:srgbClr val="0F172A"/>
+            <a:srgbClr val="070D18"/>
           </a:solidFill>
           <a:ln>
             <a:noFill/>
@@ -4672,8 +7850,8 @@
         </p:nvSpPr>
         <p:spPr>
           <a:xfrm>
-            <a:off x="731520" y="137160"/>
-            <a:ext cx="10698480" cy="822960"/>
+            <a:off x="731520" y="365760"/>
+            <a:ext cx="10698480" cy="1005840"/>
           </a:xfrm>
           <a:prstGeom prst="rect">
             <a:avLst/>
@@ -4681,46 +7859,115 @@
           <a:noFill/>
         </p:spPr>
         <p:txBody>
-          <a:bodyPr wrap="square">
+          <a:bodyPr wrap="square" lIns="0" tIns="0" rIns="0" bIns="0">
             <a:spAutoFit/>
           </a:bodyPr>
           <a:lstStyle/>
           <a:p>
             <a:pPr>
-              <a:defRPr sz="2400" b="1">
-                <a:solidFill>
-                  <a:srgbClr val="FFFFFF"/>
-                </a:solidFill>
-              </a:defRPr>
-            </a:pPr>
-            <a:r>
-              <a:t>7. Conclusion &amp; Future Roadmap</a:t>
-            </a:r>
-          </a:p>
-          <a:p>
-            <a:pPr>
-              <a:defRPr sz="1100">
-                <a:solidFill>
-                  <a:srgbClr val="94A3B8"/>
-                </a:solidFill>
-              </a:defRPr>
-            </a:pPr>
-            <a:r>
-              <a:t>Academic &amp; Industrial AI Project Series  |  Project 32 of 55</a:t>
-            </a:r>
-          </a:p>
-        </p:txBody>
-      </p:sp>
-      <p:sp>
-        <p:nvSpPr>
-          <p:cNvPr id="4" name="TextBox 3"/>
+              <a:defRPr sz="1000" b="1">
+                <a:solidFill>
+                  <a:srgbClr val="F59E0B"/>
+                </a:solidFill>
+              </a:defRPr>
+            </a:pPr>
+            <a:r>
+              <a:t>PROJECT 32 • INDUSTRIAL AI &amp; PREDICTIVE TELEMATICS</a:t>
+            </a:r>
+          </a:p>
+          <a:p>
+            <a:pPr>
+              <a:defRPr sz="2200" b="1">
+                <a:solidFill>
+                  <a:srgbClr val="F8FAFC"/>
+                </a:solidFill>
+              </a:defRPr>
+            </a:pPr>
+            <a:r>
+              <a:t>Command Center: Real-Time Predictive Maintenance Dashboard</a:t>
+            </a:r>
+          </a:p>
+        </p:txBody>
+      </p:sp>
+      <p:pic>
+        <p:nvPicPr>
+          <p:cNvPr id="4" name="Picture 3" descr="01_pdm_dashboard_overview.png"/>
+          <p:cNvPicPr>
+            <a:picLocks noChangeAspect="1"/>
+          </p:cNvPicPr>
+          <p:nvPr/>
+        </p:nvPicPr>
+        <p:blipFill>
+          <a:blip r:embed="rId2"/>
+          <a:stretch>
+            <a:fillRect/>
+          </a:stretch>
+        </p:blipFill>
+        <p:spPr>
+          <a:xfrm>
+            <a:off x="731520" y="1645920"/>
+            <a:ext cx="6858000" cy="4572000"/>
+          </a:xfrm>
+          <a:prstGeom prst="rect">
+            <a:avLst/>
+          </a:prstGeom>
+        </p:spPr>
+      </p:pic>
+      <p:sp>
+        <p:nvSpPr>
+          <p:cNvPr id="5" name="Rounded Rectangle 4"/>
+          <p:cNvSpPr/>
+          <p:nvPr/>
+        </p:nvSpPr>
+        <p:spPr>
+          <a:xfrm>
+            <a:off x="7863840" y="1645920"/>
+            <a:ext cx="3566160" cy="4572000"/>
+          </a:xfrm>
+          <a:prstGeom prst="roundRect">
+            <a:avLst/>
+          </a:prstGeom>
+          <a:solidFill>
+            <a:srgbClr val="0F1C30"/>
+          </a:solidFill>
+          <a:ln w="9525">
+            <a:solidFill>
+              <a:srgbClr val="FFFFFF"/>
+            </a:solidFill>
+          </a:ln>
+        </p:spPr>
+        <p:style>
+          <a:lnRef idx="1">
+            <a:schemeClr val="accent1"/>
+          </a:lnRef>
+          <a:fillRef idx="3">
+            <a:schemeClr val="accent1"/>
+          </a:fillRef>
+          <a:effectRef idx="2">
+            <a:schemeClr val="accent1"/>
+          </a:effectRef>
+          <a:fontRef idx="minor">
+            <a:schemeClr val="lt1"/>
+          </a:fontRef>
+        </p:style>
+        <p:txBody>
+          <a:bodyPr rtlCol="0" anchor="ctr"/>
+          <a:lstStyle/>
+          <a:p>
+            <a:pPr algn="ctr"/>
+          </a:p>
+        </p:txBody>
+      </p:sp>
+      <p:sp>
+        <p:nvSpPr>
+          <p:cNvPr id="6" name="TextBox 5"/>
           <p:cNvSpPr txBox="1"/>
           <p:nvPr/>
         </p:nvSpPr>
         <p:spPr>
           <a:xfrm>
-            <a:off x="731520" y="1371600"/>
-            <a:ext cx="10698480" cy="5029200"/>
+            <a:off x="8092440" y="1828800"/>
+            <a:ext cx="3108960" cy="4206240"/>
           </a:xfrm>
           <a:prstGeom prst="rect">
             <a:avLst/>
@@ -4728,89 +7975,340 @@
           <a:noFill/>
         </p:spPr>
         <p:txBody>
-          <a:bodyPr wrap="square">
+          <a:bodyPr wrap="square" lIns="0" tIns="0" rIns="0" bIns="0">
             <a:spAutoFit/>
           </a:bodyPr>
           <a:lstStyle/>
           <a:p>
             <a:pPr>
-              <a:spcBef>
-                <a:spcPts val="1000"/>
-              </a:spcBef>
-              <a:defRPr sz="1500" b="1">
-                <a:solidFill>
-                  <a:srgbClr val="0F172A"/>
-                </a:solidFill>
-              </a:defRPr>
-            </a:pPr>
-            <a:r>
-              <a:t>■ Project Accomplishments</a:t>
-            </a:r>
-          </a:p>
-          <a:p>
-            <a:pPr>
-              <a:defRPr sz="1300">
-                <a:solidFill>
-                  <a:srgbClr val="475569"/>
-                </a:solidFill>
-              </a:defRPr>
-            </a:pPr>
-            <a:r>
-              <a:t>Engineered a robust, end-to-end prototype validating the initial abstract with reproducible experiments.</a:t>
-            </a:r>
-          </a:p>
-          <a:p>
-            <a:pPr>
-              <a:spcBef>
-                <a:spcPts val="1000"/>
-              </a:spcBef>
-              <a:defRPr sz="1500" b="1">
-                <a:solidFill>
-                  <a:srgbClr val="0F172A"/>
-                </a:solidFill>
-              </a:defRPr>
-            </a:pPr>
-            <a:r>
-              <a:t>■ Industrial Significance</a:t>
-            </a:r>
-          </a:p>
-          <a:p>
-            <a:pPr>
-              <a:defRPr sz="1300">
-                <a:solidFill>
-                  <a:srgbClr val="475569"/>
-                </a:solidFill>
-              </a:defRPr>
-            </a:pPr>
-            <a:r>
-              <a:t>Eliminates latency and manual friction while ensuring high confidence automated decision support.</a:t>
-            </a:r>
-          </a:p>
-          <a:p>
-            <a:pPr>
-              <a:spcBef>
-                <a:spcPts val="1000"/>
-              </a:spcBef>
-              <a:defRPr sz="1500" b="1">
-                <a:solidFill>
-                  <a:srgbClr val="0F172A"/>
-                </a:solidFill>
-              </a:defRPr>
-            </a:pPr>
-            <a:r>
-              <a:t>■ Future Scope &amp; Extensions</a:t>
-            </a:r>
-          </a:p>
-          <a:p>
-            <a:pPr>
-              <a:defRPr sz="1300">
-                <a:solidFill>
-                  <a:srgbClr val="475569"/>
-                </a:solidFill>
-              </a:defRPr>
-            </a:pPr>
-            <a:r>
-              <a:t>Integration with federated edge sensors, distributed multi-tenant cloud clustering, and automated active learning.</a:t>
+              <a:defRPr sz="1400" b="1">
+                <a:solidFill>
+                  <a:srgbClr val="F59E0B"/>
+                </a:solidFill>
+              </a:defRPr>
+            </a:pPr>
+            <a:r>
+              <a:t>Dashboard Capabilities</a:t>
+            </a:r>
+          </a:p>
+          <a:p>
+            <a:pPr>
+              <a:defRPr sz="1100">
+                <a:solidFill>
+                  <a:srgbClr val="94A3B8"/>
+                </a:solidFill>
+              </a:defRPr>
+            </a:pPr>
+            <a:r>
+              <a:t>• Live fleet health index (92% aggregate fleet rating).</a:t>
+            </a:r>
+          </a:p>
+          <a:p>
+            <a:pPr>
+              <a:defRPr sz="1100">
+                <a:solidFill>
+                  <a:srgbClr val="94A3B8"/>
+                </a:solidFill>
+              </a:defRPr>
+            </a:pPr>
+            <a:r>
+              <a:t>• Asset selector cards displaying machine types, RPM, and criticality.</a:t>
+            </a:r>
+          </a:p>
+          <a:p>
+            <a:pPr>
+              <a:defRPr sz="1100">
+                <a:solidFill>
+                  <a:srgbClr val="94A3B8"/>
+                </a:solidFill>
+              </a:defRPr>
+            </a:pPr>
+            <a:r>
+              <a:t>• Hero asset telemetry status with color-coded severity indicators.</a:t>
+            </a:r>
+          </a:p>
+          <a:p>
+            <a:pPr>
+              <a:defRPr sz="1100">
+                <a:solidFill>
+                  <a:srgbClr val="94A3B8"/>
+                </a:solidFill>
+              </a:defRPr>
+            </a:pPr>
+            <a:r>
+              <a:t>• Sub-millisecond inference execution on Port 5032.</a:t>
+            </a:r>
+          </a:p>
+          <a:p>
+            <a:pPr>
+              <a:defRPr sz="1100">
+                <a:solidFill>
+                  <a:srgbClr val="94A3B8"/>
+                </a:solidFill>
+              </a:defRPr>
+            </a:pPr>
+            <a:r>
+              <a:t>• Zero-latency responsiveness powered by SQLite WAL persistence.</a:t>
+            </a:r>
+          </a:p>
+        </p:txBody>
+      </p:sp>
+    </p:spTree>
+  </p:cSld>
+  <p:clrMapOvr>
+    <a:masterClrMapping/>
+  </p:clrMapOvr>
+</p:sld>
+</file>
+
+<file path=ppt/slides/slide9.xml><?xml version="1.0" encoding="utf-8"?>
+<p:sld xmlns:a="http://schemas.openxmlformats.org/drawingml/2006/main" xmlns:p="http://schemas.openxmlformats.org/presentationml/2006/main" xmlns:r="http://schemas.openxmlformats.org/officeDocument/2006/relationships">
+  <p:cSld>
+    <p:spTree>
+      <p:nvGrpSpPr>
+        <p:cNvPr id="1" name=""/>
+        <p:cNvGrpSpPr/>
+        <p:nvPr/>
+      </p:nvGrpSpPr>
+      <p:grpSpPr/>
+      <p:sp>
+        <p:nvSpPr>
+          <p:cNvPr id="2" name="Rectangle 1"/>
+          <p:cNvSpPr/>
+          <p:nvPr/>
+        </p:nvSpPr>
+        <p:spPr>
+          <a:xfrm>
+            <a:off x="0" y="0"/>
+            <a:ext cx="12191695" cy="6858000"/>
+          </a:xfrm>
+          <a:prstGeom prst="rect">
+            <a:avLst/>
+          </a:prstGeom>
+          <a:solidFill>
+            <a:srgbClr val="070D18"/>
+          </a:solidFill>
+          <a:ln>
+            <a:noFill/>
+          </a:ln>
+        </p:spPr>
+        <p:style>
+          <a:lnRef idx="1">
+            <a:schemeClr val="accent1"/>
+          </a:lnRef>
+          <a:fillRef idx="3">
+            <a:schemeClr val="accent1"/>
+          </a:fillRef>
+          <a:effectRef idx="2">
+            <a:schemeClr val="accent1"/>
+          </a:effectRef>
+          <a:fontRef idx="minor">
+            <a:schemeClr val="lt1"/>
+          </a:fontRef>
+        </p:style>
+        <p:txBody>
+          <a:bodyPr rtlCol="0" anchor="ctr"/>
+          <a:lstStyle/>
+          <a:p>
+            <a:pPr algn="ctr"/>
+          </a:p>
+        </p:txBody>
+      </p:sp>
+      <p:sp>
+        <p:nvSpPr>
+          <p:cNvPr id="3" name="TextBox 2"/>
+          <p:cNvSpPr txBox="1"/>
+          <p:nvPr/>
+        </p:nvSpPr>
+        <p:spPr>
+          <a:xfrm>
+            <a:off x="731520" y="365760"/>
+            <a:ext cx="10698480" cy="1005840"/>
+          </a:xfrm>
+          <a:prstGeom prst="rect">
+            <a:avLst/>
+          </a:prstGeom>
+          <a:noFill/>
+        </p:spPr>
+        <p:txBody>
+          <a:bodyPr wrap="square" lIns="0" tIns="0" rIns="0" bIns="0">
+            <a:spAutoFit/>
+          </a:bodyPr>
+          <a:lstStyle/>
+          <a:p>
+            <a:pPr>
+              <a:defRPr sz="1000" b="1">
+                <a:solidFill>
+                  <a:srgbClr val="F59E0B"/>
+                </a:solidFill>
+              </a:defRPr>
+            </a:pPr>
+            <a:r>
+              <a:t>PROJECT 32 • INDUSTRIAL AI &amp; PREDICTIVE TELEMATICS</a:t>
+            </a:r>
+          </a:p>
+          <a:p>
+            <a:pPr>
+              <a:defRPr sz="2200" b="1">
+                <a:solidFill>
+                  <a:srgbClr val="F8FAFC"/>
+                </a:solidFill>
+              </a:defRPr>
+            </a:pPr>
+            <a:r>
+              <a:t>Vibration Spectrum: Harmonics &amp; Defect Energy Spikes</a:t>
+            </a:r>
+          </a:p>
+        </p:txBody>
+      </p:sp>
+      <p:pic>
+        <p:nvPicPr>
+          <p:cNvPr id="4" name="Picture 3" descr="02_fft_vibration_spectrum.png"/>
+          <p:cNvPicPr>
+            <a:picLocks noChangeAspect="1"/>
+          </p:cNvPicPr>
+          <p:nvPr/>
+        </p:nvPicPr>
+        <p:blipFill>
+          <a:blip r:embed="rId2"/>
+          <a:stretch>
+            <a:fillRect/>
+          </a:stretch>
+        </p:blipFill>
+        <p:spPr>
+          <a:xfrm>
+            <a:off x="731520" y="1645920"/>
+            <a:ext cx="6858000" cy="4572000"/>
+          </a:xfrm>
+          <a:prstGeom prst="rect">
+            <a:avLst/>
+          </a:prstGeom>
+        </p:spPr>
+      </p:pic>
+      <p:sp>
+        <p:nvSpPr>
+          <p:cNvPr id="5" name="Rounded Rectangle 4"/>
+          <p:cNvSpPr/>
+          <p:nvPr/>
+        </p:nvSpPr>
+        <p:spPr>
+          <a:xfrm>
+            <a:off x="7863840" y="1645920"/>
+            <a:ext cx="3566160" cy="4572000"/>
+          </a:xfrm>
+          <a:prstGeom prst="roundRect">
+            <a:avLst/>
+          </a:prstGeom>
+          <a:solidFill>
+            <a:srgbClr val="0F1C30"/>
+          </a:solidFill>
+          <a:ln w="9525">
+            <a:solidFill>
+              <a:srgbClr val="FFFFFF"/>
+            </a:solidFill>
+          </a:ln>
+        </p:spPr>
+        <p:style>
+          <a:lnRef idx="1">
+            <a:schemeClr val="accent1"/>
+          </a:lnRef>
+          <a:fillRef idx="3">
+            <a:schemeClr val="accent1"/>
+          </a:fillRef>
+          <a:effectRef idx="2">
+            <a:schemeClr val="accent1"/>
+          </a:effectRef>
+          <a:fontRef idx="minor">
+            <a:schemeClr val="lt1"/>
+          </a:fontRef>
+        </p:style>
+        <p:txBody>
+          <a:bodyPr rtlCol="0" anchor="ctr"/>
+          <a:lstStyle/>
+          <a:p>
+            <a:pPr algn="ctr"/>
+          </a:p>
+        </p:txBody>
+      </p:sp>
+      <p:sp>
+        <p:nvSpPr>
+          <p:cNvPr id="6" name="TextBox 5"/>
+          <p:cNvSpPr txBox="1"/>
+          <p:nvPr/>
+        </p:nvSpPr>
+        <p:spPr>
+          <a:xfrm>
+            <a:off x="8092440" y="1828800"/>
+            <a:ext cx="3108960" cy="4206240"/>
+          </a:xfrm>
+          <a:prstGeom prst="rect">
+            <a:avLst/>
+          </a:prstGeom>
+          <a:noFill/>
+        </p:spPr>
+        <p:txBody>
+          <a:bodyPr wrap="square" lIns="0" tIns="0" rIns="0" bIns="0">
+            <a:spAutoFit/>
+          </a:bodyPr>
+          <a:lstStyle/>
+          <a:p>
+            <a:pPr>
+              <a:defRPr sz="1400" b="1">
+                <a:solidFill>
+                  <a:srgbClr val="F59E0B"/>
+                </a:solidFill>
+              </a:defRPr>
+            </a:pPr>
+            <a:r>
+              <a:t>Spectral Analytics</a:t>
+            </a:r>
+          </a:p>
+          <a:p>
+            <a:pPr>
+              <a:defRPr sz="1100">
+                <a:solidFill>
+                  <a:srgbClr val="94A3B8"/>
+                </a:solidFill>
+              </a:defRPr>
+            </a:pPr>
+            <a:r>
+              <a:t>• Interactive Chart.js bar graph rendering 8-band FFT spectrum.</a:t>
+            </a:r>
+          </a:p>
+          <a:p>
+            <a:pPr>
+              <a:defRPr sz="1100">
+                <a:solidFill>
+                  <a:srgbClr val="94A3B8"/>
+                </a:solidFill>
+              </a:defRPr>
+            </a:pPr>
+            <a:r>
+              <a:t>• Color-coded thresholds: Cyan (&lt;0.6), Amber (0.6-1.2), Red (&gt;1.2 mm/s).</a:t>
+            </a:r>
+          </a:p>
+          <a:p>
+            <a:pPr>
+              <a:defRPr sz="1100">
+                <a:solidFill>
+                  <a:srgbClr val="94A3B8"/>
+                </a:solidFill>
+              </a:defRPr>
+            </a:pPr>
+            <a:r>
+              <a:t>• Automatic identification of bearing outer race impact frequencies.</a:t>
+            </a:r>
+          </a:p>
+          <a:p>
+            <a:pPr>
+              <a:defRPr sz="1100">
+                <a:solidFill>
+                  <a:srgbClr val="94A3B8"/>
+                </a:solidFill>
+              </a:defRPr>
+            </a:pPr>
+            <a:r>
+              <a:t>• Dynamic updates upon machine selection and fault simulation.</a:t>
             </a:r>
           </a:p>
         </p:txBody>
